--- a/AgenticAI/2-Core-Concepts/1_components_of_agents_and_their_role.pptx
+++ b/AgenticAI/2-Core-Concepts/1_components_of_agents_and_their_role.pptx
@@ -5,10 +5,10 @@
     <p:sldMasterId id="2147483648" r:id="rId1"/>
   </p:sldMasterIdLst>
   <p:notesMasterIdLst>
-    <p:notesMasterId r:id="rId32"/>
+    <p:notesMasterId r:id="rId33"/>
   </p:notesMasterIdLst>
   <p:handoutMasterIdLst>
-    <p:handoutMasterId r:id="rId33"/>
+    <p:handoutMasterId r:id="rId34"/>
   </p:handoutMasterIdLst>
   <p:sldIdLst>
     <p:sldId id="257" r:id="rId2"/>
@@ -16,31 +16,32 @@
     <p:sldId id="306" r:id="rId4"/>
     <p:sldId id="307" r:id="rId5"/>
     <p:sldId id="308" r:id="rId6"/>
-    <p:sldId id="305" r:id="rId7"/>
-    <p:sldId id="278" r:id="rId8"/>
-    <p:sldId id="281" r:id="rId9"/>
-    <p:sldId id="304" r:id="rId10"/>
-    <p:sldId id="309" r:id="rId11"/>
-    <p:sldId id="298" r:id="rId12"/>
-    <p:sldId id="299" r:id="rId13"/>
-    <p:sldId id="310" r:id="rId14"/>
-    <p:sldId id="300" r:id="rId15"/>
-    <p:sldId id="301" r:id="rId16"/>
-    <p:sldId id="302" r:id="rId17"/>
-    <p:sldId id="303" r:id="rId18"/>
-    <p:sldId id="311" r:id="rId19"/>
-    <p:sldId id="258" r:id="rId20"/>
-    <p:sldId id="260" r:id="rId21"/>
-    <p:sldId id="277" r:id="rId22"/>
-    <p:sldId id="312" r:id="rId23"/>
-    <p:sldId id="261" r:id="rId24"/>
-    <p:sldId id="293" r:id="rId25"/>
-    <p:sldId id="280" r:id="rId26"/>
-    <p:sldId id="295" r:id="rId27"/>
-    <p:sldId id="296" r:id="rId28"/>
-    <p:sldId id="297" r:id="rId29"/>
-    <p:sldId id="294" r:id="rId30"/>
-    <p:sldId id="279" r:id="rId31"/>
+    <p:sldId id="313" r:id="rId7"/>
+    <p:sldId id="305" r:id="rId8"/>
+    <p:sldId id="278" r:id="rId9"/>
+    <p:sldId id="281" r:id="rId10"/>
+    <p:sldId id="304" r:id="rId11"/>
+    <p:sldId id="309" r:id="rId12"/>
+    <p:sldId id="298" r:id="rId13"/>
+    <p:sldId id="299" r:id="rId14"/>
+    <p:sldId id="310" r:id="rId15"/>
+    <p:sldId id="300" r:id="rId16"/>
+    <p:sldId id="301" r:id="rId17"/>
+    <p:sldId id="302" r:id="rId18"/>
+    <p:sldId id="303" r:id="rId19"/>
+    <p:sldId id="311" r:id="rId20"/>
+    <p:sldId id="258" r:id="rId21"/>
+    <p:sldId id="260" r:id="rId22"/>
+    <p:sldId id="277" r:id="rId23"/>
+    <p:sldId id="312" r:id="rId24"/>
+    <p:sldId id="261" r:id="rId25"/>
+    <p:sldId id="293" r:id="rId26"/>
+    <p:sldId id="280" r:id="rId27"/>
+    <p:sldId id="295" r:id="rId28"/>
+    <p:sldId id="296" r:id="rId29"/>
+    <p:sldId id="297" r:id="rId30"/>
+    <p:sldId id="294" r:id="rId31"/>
+    <p:sldId id="279" r:id="rId32"/>
   </p:sldIdLst>
   <p:sldSz cx="12192000" cy="6858000"/>
   <p:notesSz cx="6858000" cy="9144000"/>
@@ -244,7 +245,7 @@
           <a:p>
             <a:fld id="{7BAEECA8-D063-486F-AE31-5020270C1449}" type="datetimeFigureOut">
               <a:rPr lang="en-US" smtClean="0"/>
-              <a:t>9/17/2026</a:t>
+              <a:t>9/21/2026</a:t>
             </a:fld>
             <a:endParaRPr lang="en-US"/>
           </a:p>
@@ -2853,7 +2854,7 @@
           <a:p>
             <a:fld id="{CB233BD1-3BA8-448D-9D08-7846095EA517}" type="datetimeFigureOut">
               <a:rPr lang="en-US" smtClean="0"/>
-              <a:t>9/17/2026</a:t>
+              <a:t>9/21/2026</a:t>
             </a:fld>
             <a:endParaRPr lang="en-US"/>
           </a:p>
@@ -3267,7 +3268,7 @@
           <a:p>
             <a:fld id="{6383FAE1-13DE-4511-8C1B-C8AFB720664C}" type="datetimeFigureOut">
               <a:rPr lang="en-US" smtClean="0"/>
-              <a:t>9/17/2026</a:t>
+              <a:t>9/21/2026</a:t>
             </a:fld>
             <a:endParaRPr lang="en-US"/>
           </a:p>
@@ -3465,7 +3466,7 @@
           <a:p>
             <a:fld id="{6383FAE1-13DE-4511-8C1B-C8AFB720664C}" type="datetimeFigureOut">
               <a:rPr lang="en-US" smtClean="0"/>
-              <a:t>9/17/2026</a:t>
+              <a:t>9/21/2026</a:t>
             </a:fld>
             <a:endParaRPr lang="en-US"/>
           </a:p>
@@ -3673,7 +3674,7 @@
           <a:p>
             <a:fld id="{6383FAE1-13DE-4511-8C1B-C8AFB720664C}" type="datetimeFigureOut">
               <a:rPr lang="en-US" smtClean="0"/>
-              <a:t>9/17/2026</a:t>
+              <a:t>9/21/2026</a:t>
             </a:fld>
             <a:endParaRPr lang="en-US"/>
           </a:p>
@@ -3871,7 +3872,7 @@
           <a:p>
             <a:fld id="{6383FAE1-13DE-4511-8C1B-C8AFB720664C}" type="datetimeFigureOut">
               <a:rPr lang="en-US" smtClean="0"/>
-              <a:t>9/17/2026</a:t>
+              <a:t>9/21/2026</a:t>
             </a:fld>
             <a:endParaRPr lang="en-US"/>
           </a:p>
@@ -4146,7 +4147,7 @@
           <a:p>
             <a:fld id="{6383FAE1-13DE-4511-8C1B-C8AFB720664C}" type="datetimeFigureOut">
               <a:rPr lang="en-US" smtClean="0"/>
-              <a:t>9/17/2026</a:t>
+              <a:t>9/21/2026</a:t>
             </a:fld>
             <a:endParaRPr lang="en-US"/>
           </a:p>
@@ -4411,7 +4412,7 @@
           <a:p>
             <a:fld id="{6383FAE1-13DE-4511-8C1B-C8AFB720664C}" type="datetimeFigureOut">
               <a:rPr lang="en-US" smtClean="0"/>
-              <a:t>9/17/2026</a:t>
+              <a:t>9/21/2026</a:t>
             </a:fld>
             <a:endParaRPr lang="en-US"/>
           </a:p>
@@ -4823,7 +4824,7 @@
           <a:p>
             <a:fld id="{6383FAE1-13DE-4511-8C1B-C8AFB720664C}" type="datetimeFigureOut">
               <a:rPr lang="en-US" smtClean="0"/>
-              <a:t>9/17/2026</a:t>
+              <a:t>9/21/2026</a:t>
             </a:fld>
             <a:endParaRPr lang="en-US"/>
           </a:p>
@@ -4964,7 +4965,7 @@
           <a:p>
             <a:fld id="{6383FAE1-13DE-4511-8C1B-C8AFB720664C}" type="datetimeFigureOut">
               <a:rPr lang="en-US" smtClean="0"/>
-              <a:t>9/17/2026</a:t>
+              <a:t>9/21/2026</a:t>
             </a:fld>
             <a:endParaRPr lang="en-US"/>
           </a:p>
@@ -5077,7 +5078,7 @@
           <a:p>
             <a:fld id="{6383FAE1-13DE-4511-8C1B-C8AFB720664C}" type="datetimeFigureOut">
               <a:rPr lang="en-US" smtClean="0"/>
-              <a:t>9/17/2026</a:t>
+              <a:t>9/21/2026</a:t>
             </a:fld>
             <a:endParaRPr lang="en-US"/>
           </a:p>
@@ -5388,7 +5389,7 @@
           <a:p>
             <a:fld id="{6383FAE1-13DE-4511-8C1B-C8AFB720664C}" type="datetimeFigureOut">
               <a:rPr lang="en-US" smtClean="0"/>
-              <a:t>9/17/2026</a:t>
+              <a:t>9/21/2026</a:t>
             </a:fld>
             <a:endParaRPr lang="en-US"/>
           </a:p>
@@ -5679,7 +5680,7 @@
           <a:p>
             <a:fld id="{6383FAE1-13DE-4511-8C1B-C8AFB720664C}" type="datetimeFigureOut">
               <a:rPr lang="en-US" smtClean="0"/>
-              <a:t>9/17/2026</a:t>
+              <a:t>9/21/2026</a:t>
             </a:fld>
             <a:endParaRPr lang="en-US"/>
           </a:p>
@@ -5923,7 +5924,7 @@
           <a:p>
             <a:fld id="{6383FAE1-13DE-4511-8C1B-C8AFB720664C}" type="datetimeFigureOut">
               <a:rPr lang="en-US" smtClean="0"/>
-              <a:t>9/17/2026</a:t>
+              <a:t>9/21/2026</a:t>
             </a:fld>
             <a:endParaRPr lang="en-US"/>
           </a:p>
@@ -6548,6 +6549,1018 @@
         <p:cNvPr id="1" name="">
           <a:extLst>
             <a:ext uri="{FF2B5EF4-FFF2-40B4-BE49-F238E27FC236}">
+              <a16:creationId xmlns:a16="http://schemas.microsoft.com/office/drawing/2014/main" id="{A3E345BD-A314-25EB-4F25-15B85A40F224}"/>
+            </a:ext>
+          </a:extLst>
+        </p:cNvPr>
+        <p:cNvGrpSpPr/>
+        <p:nvPr/>
+      </p:nvGrpSpPr>
+      <p:grpSpPr>
+        <a:xfrm>
+          <a:off x="0" y="0"/>
+          <a:ext cx="0" cy="0"/>
+          <a:chOff x="0" y="0"/>
+          <a:chExt cx="0" cy="0"/>
+        </a:xfrm>
+      </p:grpSpPr>
+      <p:sp>
+        <p:nvSpPr>
+          <p:cNvPr id="6" name="TextBox 5">
+            <a:extLst>
+              <a:ext uri="{FF2B5EF4-FFF2-40B4-BE49-F238E27FC236}">
+                <a16:creationId xmlns:a16="http://schemas.microsoft.com/office/drawing/2014/main" id="{C7001DC3-177A-561F-5B88-77181103CB1F}"/>
+              </a:ext>
+            </a:extLst>
+          </p:cNvPr>
+          <p:cNvSpPr txBox="1"/>
+          <p:nvPr/>
+        </p:nvSpPr>
+        <p:spPr>
+          <a:xfrm>
+            <a:off x="56704" y="504456"/>
+            <a:ext cx="11393424" cy="461665"/>
+          </a:xfrm>
+          <a:prstGeom prst="rect">
+            <a:avLst/>
+          </a:prstGeom>
+          <a:noFill/>
+        </p:spPr>
+        <p:txBody>
+          <a:bodyPr wrap="square">
+            <a:spAutoFit/>
+          </a:bodyPr>
+          <a:lstStyle/>
+          <a:p>
+            <a:pPr marL="0" indent="0">
+              <a:buNone/>
+            </a:pPr>
+            <a:r>
+              <a:rPr lang="en-US" sz="2400" b="1" dirty="0">
+                <a:solidFill>
+                  <a:schemeClr val="accent6">
+                    <a:lumMod val="60000"/>
+                    <a:lumOff val="40000"/>
+                  </a:schemeClr>
+                </a:solidFill>
+              </a:rPr>
+              <a:t>Agents can collaborate/communicate with other agents</a:t>
+            </a:r>
+            <a:r>
+              <a:rPr lang="en-US" sz="2400" dirty="0">
+                <a:solidFill>
+                  <a:schemeClr val="accent6">
+                    <a:lumMod val="60000"/>
+                    <a:lumOff val="40000"/>
+                  </a:schemeClr>
+                </a:solidFill>
+              </a:rPr>
+              <a:t> to achieve the goal.</a:t>
+            </a:r>
+          </a:p>
+        </p:txBody>
+      </p:sp>
+      <p:sp>
+        <p:nvSpPr>
+          <p:cNvPr id="3" name="Rectangle 2">
+            <a:extLst>
+              <a:ext uri="{FF2B5EF4-FFF2-40B4-BE49-F238E27FC236}">
+                <a16:creationId xmlns:a16="http://schemas.microsoft.com/office/drawing/2014/main" id="{C1A4F328-092F-A822-CF23-F3E67BA2B3A0}"/>
+              </a:ext>
+            </a:extLst>
+          </p:cNvPr>
+          <p:cNvSpPr/>
+          <p:nvPr/>
+        </p:nvSpPr>
+        <p:spPr>
+          <a:xfrm>
+            <a:off x="1132016" y="1783080"/>
+            <a:ext cx="1883664" cy="886968"/>
+          </a:xfrm>
+          <a:prstGeom prst="rect">
+            <a:avLst/>
+          </a:prstGeom>
+        </p:spPr>
+        <p:style>
+          <a:lnRef idx="2">
+            <a:schemeClr val="accent1">
+              <a:shade val="15000"/>
+            </a:schemeClr>
+          </a:lnRef>
+          <a:fillRef idx="1">
+            <a:schemeClr val="accent1"/>
+          </a:fillRef>
+          <a:effectRef idx="0">
+            <a:schemeClr val="accent1"/>
+          </a:effectRef>
+          <a:fontRef idx="minor">
+            <a:schemeClr val="lt1"/>
+          </a:fontRef>
+        </p:style>
+        <p:txBody>
+          <a:bodyPr rtlCol="0" anchor="ctr"/>
+          <a:lstStyle/>
+          <a:p>
+            <a:pPr algn="ctr"/>
+            <a:r>
+              <a:rPr lang="en-US" dirty="0"/>
+              <a:t>Agent1</a:t>
+            </a:r>
+          </a:p>
+        </p:txBody>
+      </p:sp>
+      <p:sp>
+        <p:nvSpPr>
+          <p:cNvPr id="5" name="Rectangle 4">
+            <a:extLst>
+              <a:ext uri="{FF2B5EF4-FFF2-40B4-BE49-F238E27FC236}">
+                <a16:creationId xmlns:a16="http://schemas.microsoft.com/office/drawing/2014/main" id="{D4C5D271-524D-D60D-5E1C-1405AB5802D3}"/>
+              </a:ext>
+            </a:extLst>
+          </p:cNvPr>
+          <p:cNvSpPr/>
+          <p:nvPr/>
+        </p:nvSpPr>
+        <p:spPr>
+          <a:xfrm>
+            <a:off x="3786316" y="1783080"/>
+            <a:ext cx="1883664" cy="886968"/>
+          </a:xfrm>
+          <a:prstGeom prst="rect">
+            <a:avLst/>
+          </a:prstGeom>
+        </p:spPr>
+        <p:style>
+          <a:lnRef idx="2">
+            <a:schemeClr val="accent1">
+              <a:shade val="15000"/>
+            </a:schemeClr>
+          </a:lnRef>
+          <a:fillRef idx="1">
+            <a:schemeClr val="accent1"/>
+          </a:fillRef>
+          <a:effectRef idx="0">
+            <a:schemeClr val="accent1"/>
+          </a:effectRef>
+          <a:fontRef idx="minor">
+            <a:schemeClr val="lt1"/>
+          </a:fontRef>
+        </p:style>
+        <p:txBody>
+          <a:bodyPr rtlCol="0" anchor="ctr"/>
+          <a:lstStyle/>
+          <a:p>
+            <a:pPr algn="ctr"/>
+            <a:r>
+              <a:rPr lang="en-US" dirty="0"/>
+              <a:t>Agent2</a:t>
+            </a:r>
+          </a:p>
+        </p:txBody>
+      </p:sp>
+      <p:sp>
+        <p:nvSpPr>
+          <p:cNvPr id="8" name="Rectangle 7">
+            <a:extLst>
+              <a:ext uri="{FF2B5EF4-FFF2-40B4-BE49-F238E27FC236}">
+                <a16:creationId xmlns:a16="http://schemas.microsoft.com/office/drawing/2014/main" id="{1676AF9A-722E-F57C-B256-22DFD8318DD0}"/>
+              </a:ext>
+            </a:extLst>
+          </p:cNvPr>
+          <p:cNvSpPr/>
+          <p:nvPr/>
+        </p:nvSpPr>
+        <p:spPr>
+          <a:xfrm>
+            <a:off x="6440616" y="1783080"/>
+            <a:ext cx="1883664" cy="886968"/>
+          </a:xfrm>
+          <a:prstGeom prst="rect">
+            <a:avLst/>
+          </a:prstGeom>
+        </p:spPr>
+        <p:style>
+          <a:lnRef idx="2">
+            <a:schemeClr val="accent1">
+              <a:shade val="15000"/>
+            </a:schemeClr>
+          </a:lnRef>
+          <a:fillRef idx="1">
+            <a:schemeClr val="accent1"/>
+          </a:fillRef>
+          <a:effectRef idx="0">
+            <a:schemeClr val="accent1"/>
+          </a:effectRef>
+          <a:fontRef idx="minor">
+            <a:schemeClr val="lt1"/>
+          </a:fontRef>
+        </p:style>
+        <p:txBody>
+          <a:bodyPr rtlCol="0" anchor="ctr"/>
+          <a:lstStyle/>
+          <a:p>
+            <a:pPr algn="ctr"/>
+            <a:r>
+              <a:rPr lang="en-US" dirty="0"/>
+              <a:t>Agent3</a:t>
+            </a:r>
+          </a:p>
+        </p:txBody>
+      </p:sp>
+      <p:sp>
+        <p:nvSpPr>
+          <p:cNvPr id="14" name="Rectangle 13">
+            <a:extLst>
+              <a:ext uri="{FF2B5EF4-FFF2-40B4-BE49-F238E27FC236}">
+                <a16:creationId xmlns:a16="http://schemas.microsoft.com/office/drawing/2014/main" id="{C2E5BA72-475F-AFE0-8515-6870570888BE}"/>
+              </a:ext>
+            </a:extLst>
+          </p:cNvPr>
+          <p:cNvSpPr/>
+          <p:nvPr/>
+        </p:nvSpPr>
+        <p:spPr>
+          <a:xfrm>
+            <a:off x="8906448" y="1783080"/>
+            <a:ext cx="1883664" cy="886968"/>
+          </a:xfrm>
+          <a:prstGeom prst="rect">
+            <a:avLst/>
+          </a:prstGeom>
+        </p:spPr>
+        <p:style>
+          <a:lnRef idx="2">
+            <a:schemeClr val="accent1">
+              <a:shade val="15000"/>
+            </a:schemeClr>
+          </a:lnRef>
+          <a:fillRef idx="1">
+            <a:schemeClr val="accent1"/>
+          </a:fillRef>
+          <a:effectRef idx="0">
+            <a:schemeClr val="accent1"/>
+          </a:effectRef>
+          <a:fontRef idx="minor">
+            <a:schemeClr val="lt1"/>
+          </a:fontRef>
+        </p:style>
+        <p:txBody>
+          <a:bodyPr rtlCol="0" anchor="ctr"/>
+          <a:lstStyle/>
+          <a:p>
+            <a:pPr algn="ctr"/>
+            <a:r>
+              <a:rPr lang="en-US" dirty="0"/>
+              <a:t>Agent4</a:t>
+            </a:r>
+          </a:p>
+        </p:txBody>
+      </p:sp>
+      <mc:AlternateContent xmlns:mc="http://schemas.openxmlformats.org/markup-compatibility/2006" xmlns:p14="http://schemas.microsoft.com/office/powerpoint/2010/main">
+        <mc:Choice Requires="p14">
+          <p:contentPart p14:bwMode="auto" r:id="rId2">
+            <p14:nvContentPartPr>
+              <p14:cNvPr id="17" name="Ink 16">
+                <a:extLst>
+                  <a:ext uri="{FF2B5EF4-FFF2-40B4-BE49-F238E27FC236}">
+                    <a16:creationId xmlns:a16="http://schemas.microsoft.com/office/drawing/2014/main" id="{6B94E43C-F160-C7CB-2E6D-3A3F7BC7C1F8}"/>
+                  </a:ext>
+                </a:extLst>
+              </p14:cNvPr>
+              <p14:cNvContentPartPr/>
+              <p14:nvPr/>
+            </p14:nvContentPartPr>
+            <p14:xfrm>
+              <a:off x="3200000" y="2154240"/>
+              <a:ext cx="517680" cy="128160"/>
+            </p14:xfrm>
+          </p:contentPart>
+        </mc:Choice>
+        <mc:Fallback xmlns="">
+          <p:pic>
+            <p:nvPicPr>
+              <p:cNvPr id="17" name="Ink 16">
+                <a:extLst>
+                  <a:ext uri="{FF2B5EF4-FFF2-40B4-BE49-F238E27FC236}">
+                    <a16:creationId xmlns:a16="http://schemas.microsoft.com/office/drawing/2014/main" id="{6B94E43C-F160-C7CB-2E6D-3A3F7BC7C1F8}"/>
+                  </a:ext>
+                </a:extLst>
+              </p:cNvPr>
+              <p:cNvPicPr/>
+              <p:nvPr/>
+            </p:nvPicPr>
+            <p:blipFill>
+              <a:blip r:embed="rId3"/>
+              <a:stretch>
+                <a:fillRect/>
+              </a:stretch>
+            </p:blipFill>
+            <p:spPr>
+              <a:xfrm>
+                <a:off x="3182000" y="2136240"/>
+                <a:ext cx="553320" cy="163800"/>
+              </a:xfrm>
+              <a:prstGeom prst="rect">
+                <a:avLst/>
+              </a:prstGeom>
+            </p:spPr>
+          </p:pic>
+        </mc:Fallback>
+      </mc:AlternateContent>
+      <p:grpSp>
+        <p:nvGrpSpPr>
+          <p:cNvPr id="23" name="Group 22">
+            <a:extLst>
+              <a:ext uri="{FF2B5EF4-FFF2-40B4-BE49-F238E27FC236}">
+                <a16:creationId xmlns:a16="http://schemas.microsoft.com/office/drawing/2014/main" id="{8C048A94-00E8-D703-AFE0-1DB9A4BBC774}"/>
+              </a:ext>
+            </a:extLst>
+          </p:cNvPr>
+          <p:cNvGrpSpPr/>
+          <p:nvPr/>
+        </p:nvGrpSpPr>
+        <p:grpSpPr>
+          <a:xfrm>
+            <a:off x="5855000" y="2158920"/>
+            <a:ext cx="444960" cy="172080"/>
+            <a:chOff x="5911704" y="4115736"/>
+            <a:chExt cx="444960" cy="172080"/>
+          </a:xfrm>
+        </p:grpSpPr>
+        <mc:AlternateContent xmlns:mc="http://schemas.openxmlformats.org/markup-compatibility/2006" xmlns:p14="http://schemas.microsoft.com/office/powerpoint/2010/main">
+          <mc:Choice Requires="p14">
+            <p:contentPart p14:bwMode="auto" r:id="rId4">
+              <p14:nvContentPartPr>
+                <p14:cNvPr id="18" name="Ink 17">
+                  <a:extLst>
+                    <a:ext uri="{FF2B5EF4-FFF2-40B4-BE49-F238E27FC236}">
+                      <a16:creationId xmlns:a16="http://schemas.microsoft.com/office/drawing/2014/main" id="{C93A8075-FE64-1AEF-A828-8CC83E583651}"/>
+                    </a:ext>
+                  </a:extLst>
+                </p14:cNvPr>
+                <p14:cNvContentPartPr/>
+                <p14:nvPr/>
+              </p14:nvContentPartPr>
+              <p14:xfrm>
+                <a:off x="5911704" y="4169016"/>
+                <a:ext cx="315000" cy="26640"/>
+              </p14:xfrm>
+            </p:contentPart>
+          </mc:Choice>
+          <mc:Fallback xmlns="">
+            <p:pic>
+              <p:nvPicPr>
+                <p:cNvPr id="18" name="Ink 17">
+                  <a:extLst>
+                    <a:ext uri="{FF2B5EF4-FFF2-40B4-BE49-F238E27FC236}">
+                      <a16:creationId xmlns:a16="http://schemas.microsoft.com/office/drawing/2014/main" id="{C93A8075-FE64-1AEF-A828-8CC83E583651}"/>
+                    </a:ext>
+                  </a:extLst>
+                </p:cNvPr>
+                <p:cNvPicPr/>
+                <p:nvPr/>
+              </p:nvPicPr>
+              <p:blipFill>
+                <a:blip r:embed="rId5"/>
+                <a:stretch>
+                  <a:fillRect/>
+                </a:stretch>
+              </p:blipFill>
+              <p:spPr>
+                <a:xfrm>
+                  <a:off x="5894064" y="4151016"/>
+                  <a:ext cx="350640" cy="62280"/>
+                </a:xfrm>
+                <a:prstGeom prst="rect">
+                  <a:avLst/>
+                </a:prstGeom>
+              </p:spPr>
+            </p:pic>
+          </mc:Fallback>
+        </mc:AlternateContent>
+        <mc:AlternateContent xmlns:mc="http://schemas.openxmlformats.org/markup-compatibility/2006" xmlns:p14="http://schemas.microsoft.com/office/powerpoint/2010/main">
+          <mc:Choice Requires="p14">
+            <p:contentPart p14:bwMode="auto" r:id="rId6">
+              <p14:nvContentPartPr>
+                <p14:cNvPr id="19" name="Ink 18">
+                  <a:extLst>
+                    <a:ext uri="{FF2B5EF4-FFF2-40B4-BE49-F238E27FC236}">
+                      <a16:creationId xmlns:a16="http://schemas.microsoft.com/office/drawing/2014/main" id="{544EDA8B-D4A4-EAA1-43D5-20272F395262}"/>
+                    </a:ext>
+                  </a:extLst>
+                </p14:cNvPr>
+                <p14:cNvContentPartPr/>
+                <p14:nvPr/>
+              </p14:nvContentPartPr>
+              <p14:xfrm>
+                <a:off x="6164424" y="4115736"/>
+                <a:ext cx="192240" cy="172080"/>
+              </p14:xfrm>
+            </p:contentPart>
+          </mc:Choice>
+          <mc:Fallback xmlns="">
+            <p:pic>
+              <p:nvPicPr>
+                <p:cNvPr id="19" name="Ink 18">
+                  <a:extLst>
+                    <a:ext uri="{FF2B5EF4-FFF2-40B4-BE49-F238E27FC236}">
+                      <a16:creationId xmlns:a16="http://schemas.microsoft.com/office/drawing/2014/main" id="{544EDA8B-D4A4-EAA1-43D5-20272F395262}"/>
+                    </a:ext>
+                  </a:extLst>
+                </p:cNvPr>
+                <p:cNvPicPr/>
+                <p:nvPr/>
+              </p:nvPicPr>
+              <p:blipFill>
+                <a:blip r:embed="rId7"/>
+                <a:stretch>
+                  <a:fillRect/>
+                </a:stretch>
+              </p:blipFill>
+              <p:spPr>
+                <a:xfrm>
+                  <a:off x="6146424" y="4097736"/>
+                  <a:ext cx="227880" cy="207720"/>
+                </a:xfrm>
+                <a:prstGeom prst="rect">
+                  <a:avLst/>
+                </a:prstGeom>
+              </p:spPr>
+            </p:pic>
+          </mc:Fallback>
+        </mc:AlternateContent>
+      </p:grpSp>
+      <p:grpSp>
+        <p:nvGrpSpPr>
+          <p:cNvPr id="22" name="Group 21">
+            <a:extLst>
+              <a:ext uri="{FF2B5EF4-FFF2-40B4-BE49-F238E27FC236}">
+                <a16:creationId xmlns:a16="http://schemas.microsoft.com/office/drawing/2014/main" id="{C57D43DD-3FD2-E350-D253-7E00D93B9D22}"/>
+              </a:ext>
+            </a:extLst>
+          </p:cNvPr>
+          <p:cNvGrpSpPr/>
+          <p:nvPr/>
+        </p:nvGrpSpPr>
+        <p:grpSpPr>
+          <a:xfrm>
+            <a:off x="8468240" y="2159280"/>
+            <a:ext cx="441000" cy="164160"/>
+            <a:chOff x="8524944" y="4116096"/>
+            <a:chExt cx="441000" cy="164160"/>
+          </a:xfrm>
+        </p:grpSpPr>
+        <mc:AlternateContent xmlns:mc="http://schemas.openxmlformats.org/markup-compatibility/2006" xmlns:p14="http://schemas.microsoft.com/office/powerpoint/2010/main">
+          <mc:Choice Requires="p14">
+            <p:contentPart p14:bwMode="auto" r:id="rId8">
+              <p14:nvContentPartPr>
+                <p14:cNvPr id="20" name="Ink 19">
+                  <a:extLst>
+                    <a:ext uri="{FF2B5EF4-FFF2-40B4-BE49-F238E27FC236}">
+                      <a16:creationId xmlns:a16="http://schemas.microsoft.com/office/drawing/2014/main" id="{9FCC5093-44EF-8ECA-D365-D8526837CC2A}"/>
+                    </a:ext>
+                  </a:extLst>
+                </p14:cNvPr>
+                <p14:cNvContentPartPr/>
+                <p14:nvPr/>
+              </p14:nvContentPartPr>
+              <p14:xfrm>
+                <a:off x="8524944" y="4182336"/>
+                <a:ext cx="351720" cy="19080"/>
+              </p14:xfrm>
+            </p:contentPart>
+          </mc:Choice>
+          <mc:Fallback xmlns="">
+            <p:pic>
+              <p:nvPicPr>
+                <p:cNvPr id="20" name="Ink 19">
+                  <a:extLst>
+                    <a:ext uri="{FF2B5EF4-FFF2-40B4-BE49-F238E27FC236}">
+                      <a16:creationId xmlns:a16="http://schemas.microsoft.com/office/drawing/2014/main" id="{9FCC5093-44EF-8ECA-D365-D8526837CC2A}"/>
+                    </a:ext>
+                  </a:extLst>
+                </p:cNvPr>
+                <p:cNvPicPr/>
+                <p:nvPr/>
+              </p:nvPicPr>
+              <p:blipFill>
+                <a:blip r:embed="rId9"/>
+                <a:stretch>
+                  <a:fillRect/>
+                </a:stretch>
+              </p:blipFill>
+              <p:spPr>
+                <a:xfrm>
+                  <a:off x="8507304" y="4164336"/>
+                  <a:ext cx="387360" cy="54720"/>
+                </a:xfrm>
+                <a:prstGeom prst="rect">
+                  <a:avLst/>
+                </a:prstGeom>
+              </p:spPr>
+            </p:pic>
+          </mc:Fallback>
+        </mc:AlternateContent>
+        <mc:AlternateContent xmlns:mc="http://schemas.openxmlformats.org/markup-compatibility/2006" xmlns:p14="http://schemas.microsoft.com/office/powerpoint/2010/main">
+          <mc:Choice Requires="p14">
+            <p:contentPart p14:bwMode="auto" r:id="rId10">
+              <p14:nvContentPartPr>
+                <p14:cNvPr id="21" name="Ink 20">
+                  <a:extLst>
+                    <a:ext uri="{FF2B5EF4-FFF2-40B4-BE49-F238E27FC236}">
+                      <a16:creationId xmlns:a16="http://schemas.microsoft.com/office/drawing/2014/main" id="{14DB4CC4-7AF4-6A31-00FB-06AA20F02CA8}"/>
+                    </a:ext>
+                  </a:extLst>
+                </p14:cNvPr>
+                <p14:cNvContentPartPr/>
+                <p14:nvPr/>
+              </p14:nvContentPartPr>
+              <p14:xfrm>
+                <a:off x="8698824" y="4116096"/>
+                <a:ext cx="267120" cy="164160"/>
+              </p14:xfrm>
+            </p:contentPart>
+          </mc:Choice>
+          <mc:Fallback xmlns="">
+            <p:pic>
+              <p:nvPicPr>
+                <p:cNvPr id="21" name="Ink 20">
+                  <a:extLst>
+                    <a:ext uri="{FF2B5EF4-FFF2-40B4-BE49-F238E27FC236}">
+                      <a16:creationId xmlns:a16="http://schemas.microsoft.com/office/drawing/2014/main" id="{14DB4CC4-7AF4-6A31-00FB-06AA20F02CA8}"/>
+                    </a:ext>
+                  </a:extLst>
+                </p:cNvPr>
+                <p:cNvPicPr/>
+                <p:nvPr/>
+              </p:nvPicPr>
+              <p:blipFill>
+                <a:blip r:embed="rId11"/>
+                <a:stretch>
+                  <a:fillRect/>
+                </a:stretch>
+              </p:blipFill>
+              <p:spPr>
+                <a:xfrm>
+                  <a:off x="8680824" y="4098456"/>
+                  <a:ext cx="302760" cy="199800"/>
+                </a:xfrm>
+                <a:prstGeom prst="rect">
+                  <a:avLst/>
+                </a:prstGeom>
+              </p:spPr>
+            </p:pic>
+          </mc:Fallback>
+        </mc:AlternateContent>
+      </p:grpSp>
+      <p:grpSp>
+        <p:nvGrpSpPr>
+          <p:cNvPr id="26" name="Group 25">
+            <a:extLst>
+              <a:ext uri="{FF2B5EF4-FFF2-40B4-BE49-F238E27FC236}">
+                <a16:creationId xmlns:a16="http://schemas.microsoft.com/office/drawing/2014/main" id="{7B932CAA-E337-825D-758C-2BFC44A3527E}"/>
+              </a:ext>
+            </a:extLst>
+          </p:cNvPr>
+          <p:cNvGrpSpPr/>
+          <p:nvPr/>
+        </p:nvGrpSpPr>
+        <p:grpSpPr>
+          <a:xfrm>
+            <a:off x="5002520" y="1105560"/>
+            <a:ext cx="3946320" cy="667800"/>
+            <a:chOff x="5059224" y="3062376"/>
+            <a:chExt cx="3946320" cy="667800"/>
+          </a:xfrm>
+        </p:grpSpPr>
+        <mc:AlternateContent xmlns:mc="http://schemas.openxmlformats.org/markup-compatibility/2006" xmlns:p14="http://schemas.microsoft.com/office/powerpoint/2010/main">
+          <mc:Choice Requires="p14">
+            <p:contentPart p14:bwMode="auto" r:id="rId12">
+              <p14:nvContentPartPr>
+                <p14:cNvPr id="24" name="Ink 23">
+                  <a:extLst>
+                    <a:ext uri="{FF2B5EF4-FFF2-40B4-BE49-F238E27FC236}">
+                      <a16:creationId xmlns:a16="http://schemas.microsoft.com/office/drawing/2014/main" id="{B258CF55-E5AB-F082-6573-18CC5FB28EFC}"/>
+                    </a:ext>
+                  </a:extLst>
+                </p14:cNvPr>
+                <p14:cNvContentPartPr/>
+                <p14:nvPr/>
+              </p14:nvContentPartPr>
+              <p14:xfrm>
+                <a:off x="5059224" y="3062376"/>
+                <a:ext cx="3918240" cy="667800"/>
+              </p14:xfrm>
+            </p:contentPart>
+          </mc:Choice>
+          <mc:Fallback xmlns="">
+            <p:pic>
+              <p:nvPicPr>
+                <p:cNvPr id="24" name="Ink 23">
+                  <a:extLst>
+                    <a:ext uri="{FF2B5EF4-FFF2-40B4-BE49-F238E27FC236}">
+                      <a16:creationId xmlns:a16="http://schemas.microsoft.com/office/drawing/2014/main" id="{B258CF55-E5AB-F082-6573-18CC5FB28EFC}"/>
+                    </a:ext>
+                  </a:extLst>
+                </p:cNvPr>
+                <p:cNvPicPr/>
+                <p:nvPr/>
+              </p:nvPicPr>
+              <p:blipFill>
+                <a:blip r:embed="rId13"/>
+                <a:stretch>
+                  <a:fillRect/>
+                </a:stretch>
+              </p:blipFill>
+              <p:spPr>
+                <a:xfrm>
+                  <a:off x="5041584" y="3044376"/>
+                  <a:ext cx="3953880" cy="703440"/>
+                </a:xfrm>
+                <a:prstGeom prst="rect">
+                  <a:avLst/>
+                </a:prstGeom>
+              </p:spPr>
+            </p:pic>
+          </mc:Fallback>
+        </mc:AlternateContent>
+        <mc:AlternateContent xmlns:mc="http://schemas.openxmlformats.org/markup-compatibility/2006" xmlns:p14="http://schemas.microsoft.com/office/powerpoint/2010/main">
+          <mc:Choice Requires="p14">
+            <p:contentPart p14:bwMode="auto" r:id="rId14">
+              <p14:nvContentPartPr>
+                <p14:cNvPr id="25" name="Ink 24">
+                  <a:extLst>
+                    <a:ext uri="{FF2B5EF4-FFF2-40B4-BE49-F238E27FC236}">
+                      <a16:creationId xmlns:a16="http://schemas.microsoft.com/office/drawing/2014/main" id="{7793DCE5-CC3C-4CB2-150A-00A5AE7353C3}"/>
+                    </a:ext>
+                  </a:extLst>
+                </p14:cNvPr>
+                <p14:cNvContentPartPr/>
+                <p14:nvPr/>
+              </p14:nvContentPartPr>
+              <p14:xfrm>
+                <a:off x="8775504" y="3388896"/>
+                <a:ext cx="230040" cy="167040"/>
+              </p14:xfrm>
+            </p:contentPart>
+          </mc:Choice>
+          <mc:Fallback xmlns="">
+            <p:pic>
+              <p:nvPicPr>
+                <p:cNvPr id="25" name="Ink 24">
+                  <a:extLst>
+                    <a:ext uri="{FF2B5EF4-FFF2-40B4-BE49-F238E27FC236}">
+                      <a16:creationId xmlns:a16="http://schemas.microsoft.com/office/drawing/2014/main" id="{7793DCE5-CC3C-4CB2-150A-00A5AE7353C3}"/>
+                    </a:ext>
+                  </a:extLst>
+                </p:cNvPr>
+                <p:cNvPicPr/>
+                <p:nvPr/>
+              </p:nvPicPr>
+              <p:blipFill>
+                <a:blip r:embed="rId15"/>
+                <a:stretch>
+                  <a:fillRect/>
+                </a:stretch>
+              </p:blipFill>
+              <p:spPr>
+                <a:xfrm>
+                  <a:off x="8757504" y="3371256"/>
+                  <a:ext cx="265680" cy="202680"/>
+                </a:xfrm>
+                <a:prstGeom prst="rect">
+                  <a:avLst/>
+                </a:prstGeom>
+              </p:spPr>
+            </p:pic>
+          </mc:Fallback>
+        </mc:AlternateContent>
+      </p:grpSp>
+      <p:sp>
+        <p:nvSpPr>
+          <p:cNvPr id="29" name="Oval 28">
+            <a:extLst>
+              <a:ext uri="{FF2B5EF4-FFF2-40B4-BE49-F238E27FC236}">
+                <a16:creationId xmlns:a16="http://schemas.microsoft.com/office/drawing/2014/main" id="{B5E8DE72-4FA6-75EE-EF69-BCDF5E0168EA}"/>
+              </a:ext>
+            </a:extLst>
+          </p:cNvPr>
+          <p:cNvSpPr/>
+          <p:nvPr/>
+        </p:nvSpPr>
+        <p:spPr>
+          <a:xfrm>
+            <a:off x="0" y="1871904"/>
+            <a:ext cx="931248" cy="707231"/>
+          </a:xfrm>
+          <a:prstGeom prst="ellipse">
+            <a:avLst/>
+          </a:prstGeom>
+        </p:spPr>
+        <p:style>
+          <a:lnRef idx="2">
+            <a:schemeClr val="accent1">
+              <a:shade val="15000"/>
+            </a:schemeClr>
+          </a:lnRef>
+          <a:fillRef idx="1">
+            <a:schemeClr val="accent1"/>
+          </a:fillRef>
+          <a:effectRef idx="0">
+            <a:schemeClr val="accent1"/>
+          </a:effectRef>
+          <a:fontRef idx="minor">
+            <a:schemeClr val="lt1"/>
+          </a:fontRef>
+        </p:style>
+        <p:txBody>
+          <a:bodyPr rtlCol="0" anchor="ctr"/>
+          <a:lstStyle/>
+          <a:p>
+            <a:pPr algn="ctr"/>
+            <a:r>
+              <a:rPr lang="en-US" dirty="0"/>
+              <a:t>Goal</a:t>
+            </a:r>
+          </a:p>
+        </p:txBody>
+      </p:sp>
+      <p:sp>
+        <p:nvSpPr>
+          <p:cNvPr id="31" name="Oval 30">
+            <a:extLst>
+              <a:ext uri="{FF2B5EF4-FFF2-40B4-BE49-F238E27FC236}">
+                <a16:creationId xmlns:a16="http://schemas.microsoft.com/office/drawing/2014/main" id="{7F1ABF4D-364D-0B73-5853-47D988DEFBFC}"/>
+              </a:ext>
+            </a:extLst>
+          </p:cNvPr>
+          <p:cNvSpPr/>
+          <p:nvPr/>
+        </p:nvSpPr>
+        <p:spPr>
+          <a:xfrm>
+            <a:off x="11054440" y="1890984"/>
+            <a:ext cx="1080856" cy="707231"/>
+          </a:xfrm>
+          <a:prstGeom prst="ellipse">
+            <a:avLst/>
+          </a:prstGeom>
+        </p:spPr>
+        <p:style>
+          <a:lnRef idx="2">
+            <a:schemeClr val="accent1">
+              <a:shade val="15000"/>
+            </a:schemeClr>
+          </a:lnRef>
+          <a:fillRef idx="1">
+            <a:schemeClr val="accent1"/>
+          </a:fillRef>
+          <a:effectRef idx="0">
+            <a:schemeClr val="accent1"/>
+          </a:effectRef>
+          <a:fontRef idx="minor">
+            <a:schemeClr val="lt1"/>
+          </a:fontRef>
+        </p:style>
+        <p:txBody>
+          <a:bodyPr rtlCol="0" anchor="ctr"/>
+          <a:lstStyle/>
+          <a:p>
+            <a:pPr algn="ctr"/>
+            <a:r>
+              <a:rPr lang="en-US" dirty="0"/>
+              <a:t>Result</a:t>
+            </a:r>
+          </a:p>
+        </p:txBody>
+      </p:sp>
+      <mc:AlternateContent xmlns:mc="http://schemas.openxmlformats.org/markup-compatibility/2006" xmlns:p14="http://schemas.microsoft.com/office/powerpoint/2010/main">
+        <mc:Choice Requires="p14">
+          <p:contentPart p14:bwMode="auto" r:id="rId16">
+            <p14:nvContentPartPr>
+              <p14:cNvPr id="32" name="Ink 31">
+                <a:extLst>
+                  <a:ext uri="{FF2B5EF4-FFF2-40B4-BE49-F238E27FC236}">
+                    <a16:creationId xmlns:a16="http://schemas.microsoft.com/office/drawing/2014/main" id="{783A5B0B-2FB7-2A1D-1F97-34D46C43ADC8}"/>
+                  </a:ext>
+                </a:extLst>
+              </p14:cNvPr>
+              <p14:cNvContentPartPr/>
+              <p14:nvPr/>
+            </p14:nvContentPartPr>
+            <p14:xfrm>
+              <a:off x="964400" y="2166840"/>
+              <a:ext cx="165960" cy="128520"/>
+            </p14:xfrm>
+          </p:contentPart>
+        </mc:Choice>
+        <mc:Fallback xmlns="">
+          <p:pic>
+            <p:nvPicPr>
+              <p:cNvPr id="32" name="Ink 31">
+                <a:extLst>
+                  <a:ext uri="{FF2B5EF4-FFF2-40B4-BE49-F238E27FC236}">
+                    <a16:creationId xmlns:a16="http://schemas.microsoft.com/office/drawing/2014/main" id="{783A5B0B-2FB7-2A1D-1F97-34D46C43ADC8}"/>
+                  </a:ext>
+                </a:extLst>
+              </p:cNvPr>
+              <p:cNvPicPr/>
+              <p:nvPr/>
+            </p:nvPicPr>
+            <p:blipFill>
+              <a:blip r:embed="rId17"/>
+              <a:stretch>
+                <a:fillRect/>
+              </a:stretch>
+            </p:blipFill>
+            <p:spPr>
+              <a:xfrm>
+                <a:off x="946400" y="2148890"/>
+                <a:ext cx="201600" cy="164060"/>
+              </a:xfrm>
+              <a:prstGeom prst="rect">
+                <a:avLst/>
+              </a:prstGeom>
+            </p:spPr>
+          </p:pic>
+        </mc:Fallback>
+      </mc:AlternateContent>
+      <mc:AlternateContent xmlns:mc="http://schemas.openxmlformats.org/markup-compatibility/2006" xmlns:p14="http://schemas.microsoft.com/office/powerpoint/2010/main">
+        <mc:Choice Requires="p14">
+          <p:contentPart p14:bwMode="auto" r:id="rId18">
+            <p14:nvContentPartPr>
+              <p14:cNvPr id="33" name="Ink 32">
+                <a:extLst>
+                  <a:ext uri="{FF2B5EF4-FFF2-40B4-BE49-F238E27FC236}">
+                    <a16:creationId xmlns:a16="http://schemas.microsoft.com/office/drawing/2014/main" id="{674921D6-68B5-E6A4-02B7-1C6183F8E466}"/>
+                  </a:ext>
+                </a:extLst>
+              </p14:cNvPr>
+              <p14:cNvContentPartPr/>
+              <p14:nvPr/>
+            </p14:nvContentPartPr>
+            <p14:xfrm>
+              <a:off x="10880960" y="2257560"/>
+              <a:ext cx="182880" cy="70560"/>
+            </p14:xfrm>
+          </p:contentPart>
+        </mc:Choice>
+        <mc:Fallback xmlns="">
+          <p:pic>
+            <p:nvPicPr>
+              <p:cNvPr id="33" name="Ink 32">
+                <a:extLst>
+                  <a:ext uri="{FF2B5EF4-FFF2-40B4-BE49-F238E27FC236}">
+                    <a16:creationId xmlns:a16="http://schemas.microsoft.com/office/drawing/2014/main" id="{674921D6-68B5-E6A4-02B7-1C6183F8E466}"/>
+                  </a:ext>
+                </a:extLst>
+              </p:cNvPr>
+              <p:cNvPicPr/>
+              <p:nvPr/>
+            </p:nvPicPr>
+            <p:blipFill>
+              <a:blip r:embed="rId19"/>
+              <a:stretch>
+                <a:fillRect/>
+              </a:stretch>
+            </p:blipFill>
+            <p:spPr>
+              <a:xfrm>
+                <a:off x="10862960" y="2239560"/>
+                <a:ext cx="218520" cy="106200"/>
+              </a:xfrm>
+              <a:prstGeom prst="rect">
+                <a:avLst/>
+              </a:prstGeom>
+            </p:spPr>
+          </p:pic>
+        </mc:Fallback>
+      </mc:AlternateContent>
+      <p:sp>
+        <p:nvSpPr>
+          <p:cNvPr id="4" name="TextBox 3">
+            <a:extLst>
+              <a:ext uri="{FF2B5EF4-FFF2-40B4-BE49-F238E27FC236}">
+                <a16:creationId xmlns:a16="http://schemas.microsoft.com/office/drawing/2014/main" id="{35235576-FB0D-B3B5-5994-A3AB09B908F4}"/>
+              </a:ext>
+            </a:extLst>
+          </p:cNvPr>
+          <p:cNvSpPr txBox="1"/>
+          <p:nvPr/>
+        </p:nvSpPr>
+        <p:spPr>
+          <a:xfrm>
+            <a:off x="310896" y="3105835"/>
+            <a:ext cx="11987784" cy="2677656"/>
+          </a:xfrm>
+          <a:prstGeom prst="rect">
+            <a:avLst/>
+          </a:prstGeom>
+          <a:noFill/>
+        </p:spPr>
+        <p:txBody>
+          <a:bodyPr wrap="square">
+            <a:spAutoFit/>
+          </a:bodyPr>
+          <a:lstStyle/>
+          <a:p>
+            <a:r>
+              <a:rPr lang="en-US" sz="2400" dirty="0">
+                <a:solidFill>
+                  <a:schemeClr val="accent6">
+                    <a:lumMod val="60000"/>
+                    <a:lumOff val="40000"/>
+                  </a:schemeClr>
+                </a:solidFill>
+              </a:rPr>
+              <a:t>GOAL: Add an automatic 'dark mode' toggle to our web app that triggers based on the user's local sunset time.</a:t>
+            </a:r>
+          </a:p>
+          <a:p>
+            <a:endParaRPr lang="en-US" sz="2400" dirty="0">
+              <a:solidFill>
+                <a:schemeClr val="accent6">
+                  <a:lumMod val="60000"/>
+                  <a:lumOff val="40000"/>
+                </a:schemeClr>
+              </a:solidFill>
+            </a:endParaRPr>
+          </a:p>
+          <a:p>
+            <a:r>
+              <a:rPr lang="en-US" sz="2400" dirty="0">
+                <a:solidFill>
+                  <a:schemeClr val="accent6">
+                    <a:lumMod val="60000"/>
+                    <a:lumOff val="40000"/>
+                  </a:schemeClr>
+                </a:solidFill>
+              </a:rPr>
+              <a:t>Agent1 (Product Mgr. ) – Creates/Analyses the requirements, and defines success criteria. </a:t>
+            </a:r>
+          </a:p>
+          <a:p>
+            <a:r>
+              <a:rPr lang="en-US" sz="2400" dirty="0">
+                <a:solidFill>
+                  <a:schemeClr val="accent6">
+                    <a:lumMod val="60000"/>
+                    <a:lumOff val="40000"/>
+                  </a:schemeClr>
+                </a:solidFill>
+              </a:rPr>
+              <a:t>Agent2 (Planner) - Takes the requirements and assigns it the software Dev agent and QA</a:t>
+            </a:r>
+          </a:p>
+          <a:p>
+            <a:r>
+              <a:rPr lang="en-US" sz="2400" dirty="0">
+                <a:solidFill>
+                  <a:schemeClr val="accent6">
+                    <a:lumMod val="60000"/>
+                    <a:lumOff val="40000"/>
+                  </a:schemeClr>
+                </a:solidFill>
+              </a:rPr>
+              <a:t>Agent3 (Developer) -  Develops the code</a:t>
+            </a:r>
+          </a:p>
+          <a:p>
+            <a:r>
+              <a:rPr lang="en-US" sz="2400" dirty="0">
+                <a:solidFill>
+                  <a:schemeClr val="accent6">
+                    <a:lumMod val="60000"/>
+                    <a:lumOff val="40000"/>
+                  </a:schemeClr>
+                </a:solidFill>
+              </a:rPr>
+              <a:t>Agent4 (Quality Assurance) - Reviews code, writes tests, and hunts for bugs.</a:t>
+            </a:r>
+          </a:p>
+        </p:txBody>
+      </p:sp>
+    </p:spTree>
+    <p:extLst>
+      <p:ext uri="{BB962C8B-B14F-4D97-AF65-F5344CB8AC3E}">
+        <p14:creationId xmlns:p14="http://schemas.microsoft.com/office/powerpoint/2010/main" val="1311170348"/>
+      </p:ext>
+    </p:extLst>
+  </p:cSld>
+  <p:clrMapOvr>
+    <a:masterClrMapping/>
+  </p:clrMapOvr>
+</p:sld>
+</file>
+
+<file path=ppt/slides/slide11.xml><?xml version="1.0" encoding="utf-8"?>
+<p:sld xmlns:a="http://schemas.openxmlformats.org/drawingml/2006/main" xmlns:r="http://schemas.openxmlformats.org/officeDocument/2006/relationships" xmlns:p="http://schemas.openxmlformats.org/presentationml/2006/main">
+  <p:cSld>
+    <p:spTree>
+      <p:nvGrpSpPr>
+        <p:cNvPr id="1" name="">
+          <a:extLst>
+            <a:ext uri="{FF2B5EF4-FFF2-40B4-BE49-F238E27FC236}">
               <a16:creationId xmlns:a16="http://schemas.microsoft.com/office/drawing/2014/main" id="{715A8ED8-F8F6-482B-40D6-D65C0FCD06A2}"/>
             </a:ext>
           </a:extLst>
@@ -7508,7 +8521,7 @@
 </p:sld>
 </file>
 
-<file path=ppt/slides/slide11.xml><?xml version="1.0" encoding="utf-8"?>
+<file path=ppt/slides/slide12.xml><?xml version="1.0" encoding="utf-8"?>
 <p:sld xmlns:a="http://schemas.openxmlformats.org/drawingml/2006/main" xmlns:r="http://schemas.openxmlformats.org/officeDocument/2006/relationships" xmlns:p="http://schemas.openxmlformats.org/presentationml/2006/main">
   <p:cSld>
     <p:spTree>
@@ -8171,7 +9184,7 @@
 </p:sld>
 </file>
 
-<file path=ppt/slides/slide12.xml><?xml version="1.0" encoding="utf-8"?>
+<file path=ppt/slides/slide13.xml><?xml version="1.0" encoding="utf-8"?>
 <p:sld xmlns:a="http://schemas.openxmlformats.org/drawingml/2006/main" xmlns:r="http://schemas.openxmlformats.org/officeDocument/2006/relationships" xmlns:p="http://schemas.openxmlformats.org/presentationml/2006/main">
   <p:cSld>
     <p:spTree>
@@ -8258,7 +9271,7 @@
 </p:sld>
 </file>
 
-<file path=ppt/slides/slide13.xml><?xml version="1.0" encoding="utf-8"?>
+<file path=ppt/slides/slide14.xml><?xml version="1.0" encoding="utf-8"?>
 <p:sld xmlns:a="http://schemas.openxmlformats.org/drawingml/2006/main" xmlns:r="http://schemas.openxmlformats.org/officeDocument/2006/relationships" xmlns:p="http://schemas.openxmlformats.org/presentationml/2006/main">
   <p:cSld>
     <p:spTree>
@@ -8372,7 +9385,7 @@
 </p:sld>
 </file>
 
-<file path=ppt/slides/slide14.xml><?xml version="1.0" encoding="utf-8"?>
+<file path=ppt/slides/slide15.xml><?xml version="1.0" encoding="utf-8"?>
 <p:sld xmlns:a="http://schemas.openxmlformats.org/drawingml/2006/main" xmlns:r="http://schemas.openxmlformats.org/officeDocument/2006/relationships" xmlns:p="http://schemas.openxmlformats.org/presentationml/2006/main">
   <p:cSld>
     <p:spTree>
@@ -8668,7 +9681,7 @@
 </p:sld>
 </file>
 
-<file path=ppt/slides/slide15.xml><?xml version="1.0" encoding="utf-8"?>
+<file path=ppt/slides/slide16.xml><?xml version="1.0" encoding="utf-8"?>
 <p:sld xmlns:a="http://schemas.openxmlformats.org/drawingml/2006/main" xmlns:r="http://schemas.openxmlformats.org/officeDocument/2006/relationships" xmlns:p="http://schemas.openxmlformats.org/presentationml/2006/main">
   <p:cSld>
     <p:spTree>
@@ -8976,7 +9989,7 @@
 </p:sld>
 </file>
 
-<file path=ppt/slides/slide16.xml><?xml version="1.0" encoding="utf-8"?>
+<file path=ppt/slides/slide17.xml><?xml version="1.0" encoding="utf-8"?>
 <p:sld xmlns:a="http://schemas.openxmlformats.org/drawingml/2006/main" xmlns:r="http://schemas.openxmlformats.org/officeDocument/2006/relationships" xmlns:p="http://schemas.openxmlformats.org/presentationml/2006/main">
   <p:cSld>
     <p:spTree>
@@ -9334,7 +10347,7 @@
 </p:sld>
 </file>
 
-<file path=ppt/slides/slide17.xml><?xml version="1.0" encoding="utf-8"?>
+<file path=ppt/slides/slide18.xml><?xml version="1.0" encoding="utf-8"?>
 <p:sld xmlns:a="http://schemas.openxmlformats.org/drawingml/2006/main" xmlns:r="http://schemas.openxmlformats.org/officeDocument/2006/relationships" xmlns:p="http://schemas.openxmlformats.org/presentationml/2006/main">
   <p:cSld>
     <p:spTree>
@@ -9627,7 +10640,7 @@
 </p:sld>
 </file>
 
-<file path=ppt/slides/slide18.xml><?xml version="1.0" encoding="utf-8"?>
+<file path=ppt/slides/slide19.xml><?xml version="1.0" encoding="utf-8"?>
 <p:sld xmlns:a="http://schemas.openxmlformats.org/drawingml/2006/main" xmlns:r="http://schemas.openxmlformats.org/officeDocument/2006/relationships" xmlns:p="http://schemas.openxmlformats.org/presentationml/2006/main">
   <p:cSld>
     <p:spTree>
@@ -9705,665 +10718,6 @@
     <p:extLst>
       <p:ext uri="{BB962C8B-B14F-4D97-AF65-F5344CB8AC3E}">
         <p14:creationId xmlns:p14="http://schemas.microsoft.com/office/powerpoint/2010/main" val="3513782787"/>
-      </p:ext>
-    </p:extLst>
-  </p:cSld>
-  <p:clrMapOvr>
-    <a:masterClrMapping/>
-  </p:clrMapOvr>
-</p:sld>
-</file>
-
-<file path=ppt/slides/slide19.xml><?xml version="1.0" encoding="utf-8"?>
-<p:sld xmlns:a="http://schemas.openxmlformats.org/drawingml/2006/main" xmlns:r="http://schemas.openxmlformats.org/officeDocument/2006/relationships" xmlns:p="http://schemas.openxmlformats.org/presentationml/2006/main">
-  <p:cSld>
-    <p:spTree>
-      <p:nvGrpSpPr>
-        <p:cNvPr id="1" name=""/>
-        <p:cNvGrpSpPr/>
-        <p:nvPr/>
-      </p:nvGrpSpPr>
-      <p:grpSpPr>
-        <a:xfrm>
-          <a:off x="0" y="0"/>
-          <a:ext cx="0" cy="0"/>
-          <a:chOff x="0" y="0"/>
-          <a:chExt cx="0" cy="0"/>
-        </a:xfrm>
-      </p:grpSpPr>
-      <p:sp>
-        <p:nvSpPr>
-          <p:cNvPr id="4" name="TextBox 3"/>
-          <p:cNvSpPr txBox="1"/>
-          <p:nvPr/>
-        </p:nvSpPr>
-        <p:spPr>
-          <a:xfrm>
-            <a:off x="197050" y="719400"/>
-            <a:ext cx="11797900" cy="3785652"/>
-          </a:xfrm>
-          <a:prstGeom prst="rect">
-            <a:avLst/>
-          </a:prstGeom>
-          <a:noFill/>
-        </p:spPr>
-        <p:txBody>
-          <a:bodyPr wrap="square" rtlCol="0">
-            <a:spAutoFit/>
-          </a:bodyPr>
-          <a:lstStyle/>
-          <a:p>
-            <a:r>
-              <a:rPr lang="en-US" sz="2400" dirty="0">
-                <a:solidFill>
-                  <a:schemeClr val="accent6">
-                    <a:lumMod val="60000"/>
-                    <a:lumOff val="40000"/>
-                  </a:schemeClr>
-                </a:solidFill>
-              </a:rPr>
-              <a:t>Imagine you're trying to book a vacation. </a:t>
-            </a:r>
-          </a:p>
-          <a:p>
-            <a:r>
-              <a:rPr lang="en-US" sz="2400" dirty="0">
-                <a:solidFill>
-                  <a:schemeClr val="accent6">
-                    <a:lumMod val="60000"/>
-                    <a:lumOff val="40000"/>
-                  </a:schemeClr>
-                </a:solidFill>
-              </a:rPr>
-              <a:t>You need to research flights -&gt; find hotels -&gt; check restaurant reviews -&gt; and keep track of your budget.</a:t>
-            </a:r>
-          </a:p>
-          <a:p>
-            <a:endParaRPr lang="en-US" sz="2400" b="1" dirty="0">
-              <a:solidFill>
-                <a:schemeClr val="accent6">
-                  <a:lumMod val="60000"/>
-                  <a:lumOff val="40000"/>
-                </a:schemeClr>
-              </a:solidFill>
-            </a:endParaRPr>
-          </a:p>
-          <a:p>
-            <a:r>
-              <a:rPr lang="en-US" sz="2400" b="1" u="sng" dirty="0">
-                <a:solidFill>
-                  <a:schemeClr val="accent6">
-                    <a:lumMod val="60000"/>
-                    <a:lumOff val="40000"/>
-                  </a:schemeClr>
-                </a:solidFill>
-              </a:rPr>
-              <a:t>Traditional workflow automation</a:t>
-            </a:r>
-            <a:endParaRPr lang="en-US" sz="2400" u="sng" dirty="0">
-              <a:solidFill>
-                <a:schemeClr val="accent6">
-                  <a:lumMod val="60000"/>
-                  <a:lumOff val="40000"/>
-                </a:schemeClr>
-              </a:solidFill>
-            </a:endParaRPr>
-          </a:p>
-          <a:p>
-            <a:r>
-              <a:rPr lang="en-US" sz="2400" dirty="0">
-                <a:solidFill>
-                  <a:schemeClr val="accent6">
-                    <a:lumMod val="60000"/>
-                    <a:lumOff val="40000"/>
-                  </a:schemeClr>
-                </a:solidFill>
-              </a:rPr>
-              <a:t>A traditional automation system follows a predetermined sequence: </a:t>
-            </a:r>
-          </a:p>
-          <a:p>
-            <a:r>
-              <a:rPr lang="en-US" sz="2400" dirty="0">
-                <a:solidFill>
-                  <a:schemeClr val="accent6">
-                    <a:lumMod val="60000"/>
-                    <a:lumOff val="40000"/>
-                  </a:schemeClr>
-                </a:solidFill>
-              </a:rPr>
-              <a:t>It takes inputs such as </a:t>
-            </a:r>
-            <a:r>
-              <a:rPr lang="en-US" sz="2400" b="1" i="1" dirty="0">
-                <a:solidFill>
-                  <a:schemeClr val="accent6">
-                    <a:lumMod val="60000"/>
-                    <a:lumOff val="40000"/>
-                  </a:schemeClr>
-                </a:solidFill>
-              </a:rPr>
-              <a:t>dates, location, and budget</a:t>
-            </a:r>
-            <a:r>
-              <a:rPr lang="en-US" sz="2400" dirty="0">
-                <a:solidFill>
-                  <a:schemeClr val="accent6">
-                    <a:lumMod val="60000"/>
-                    <a:lumOff val="40000"/>
-                  </a:schemeClr>
-                </a:solidFill>
-              </a:rPr>
-              <a:t>, and make calls to predefined APIs in a fixed order. </a:t>
-            </a:r>
-          </a:p>
-          <a:p>
-            <a:r>
-              <a:rPr lang="en-US" sz="2400" dirty="0">
-                <a:solidFill>
-                  <a:schemeClr val="accent6">
-                    <a:lumMod val="60000"/>
-                    <a:lumOff val="40000"/>
-                  </a:schemeClr>
-                </a:solidFill>
-              </a:rPr>
-              <a:t>However, if any unexpected situations arise, such as flights being sold out, or the specified hotels being unavailable, it cannot adapt.</a:t>
-            </a:r>
-          </a:p>
-        </p:txBody>
-      </p:sp>
-      <p:sp>
-        <p:nvSpPr>
-          <p:cNvPr id="5" name="Rectangle 4"/>
-          <p:cNvSpPr/>
-          <p:nvPr/>
-        </p:nvSpPr>
-        <p:spPr>
-          <a:xfrm>
-            <a:off x="4147188" y="5018041"/>
-            <a:ext cx="914400" cy="914400"/>
-          </a:xfrm>
-          <a:prstGeom prst="rect">
-            <a:avLst/>
-          </a:prstGeom>
-        </p:spPr>
-        <p:style>
-          <a:lnRef idx="2">
-            <a:schemeClr val="accent1">
-              <a:shade val="50000"/>
-            </a:schemeClr>
-          </a:lnRef>
-          <a:fillRef idx="1">
-            <a:schemeClr val="accent1"/>
-          </a:fillRef>
-          <a:effectRef idx="0">
-            <a:schemeClr val="accent1"/>
-          </a:effectRef>
-          <a:fontRef idx="minor">
-            <a:schemeClr val="lt1"/>
-          </a:fontRef>
-        </p:style>
-        <p:txBody>
-          <a:bodyPr rtlCol="0" anchor="ctr"/>
-          <a:lstStyle/>
-          <a:p>
-            <a:pPr algn="ctr"/>
-            <a:r>
-              <a:rPr lang="en-US" dirty="0">
-                <a:solidFill>
-                  <a:schemeClr val="accent6">
-                    <a:lumMod val="60000"/>
-                    <a:lumOff val="40000"/>
-                  </a:schemeClr>
-                </a:solidFill>
-              </a:rPr>
-              <a:t>step2</a:t>
-            </a:r>
-          </a:p>
-        </p:txBody>
-      </p:sp>
-      <p:sp>
-        <p:nvSpPr>
-          <p:cNvPr id="6" name="Rectangle 5"/>
-          <p:cNvSpPr/>
-          <p:nvPr/>
-        </p:nvSpPr>
-        <p:spPr>
-          <a:xfrm>
-            <a:off x="407092" y="5019439"/>
-            <a:ext cx="914400" cy="914400"/>
-          </a:xfrm>
-          <a:prstGeom prst="rect">
-            <a:avLst/>
-          </a:prstGeom>
-        </p:spPr>
-        <p:style>
-          <a:lnRef idx="2">
-            <a:schemeClr val="accent1">
-              <a:shade val="50000"/>
-            </a:schemeClr>
-          </a:lnRef>
-          <a:fillRef idx="1">
-            <a:schemeClr val="accent1"/>
-          </a:fillRef>
-          <a:effectRef idx="0">
-            <a:schemeClr val="accent1"/>
-          </a:effectRef>
-          <a:fontRef idx="minor">
-            <a:schemeClr val="lt1"/>
-          </a:fontRef>
-        </p:style>
-        <p:txBody>
-          <a:bodyPr rtlCol="0" anchor="ctr"/>
-          <a:lstStyle/>
-          <a:p>
-            <a:pPr algn="ctr"/>
-            <a:r>
-              <a:rPr lang="en-US" dirty="0">
-                <a:solidFill>
-                  <a:schemeClr val="accent6">
-                    <a:lumMod val="60000"/>
-                    <a:lumOff val="40000"/>
-                  </a:schemeClr>
-                </a:solidFill>
-              </a:rPr>
-              <a:t>Input</a:t>
-            </a:r>
-          </a:p>
-        </p:txBody>
-      </p:sp>
-      <p:sp>
-        <p:nvSpPr>
-          <p:cNvPr id="7" name="Rectangle 6"/>
-          <p:cNvSpPr/>
-          <p:nvPr/>
-        </p:nvSpPr>
-        <p:spPr>
-          <a:xfrm>
-            <a:off x="2273639" y="5106126"/>
-            <a:ext cx="914400" cy="914400"/>
-          </a:xfrm>
-          <a:prstGeom prst="rect">
-            <a:avLst/>
-          </a:prstGeom>
-        </p:spPr>
-        <p:style>
-          <a:lnRef idx="2">
-            <a:schemeClr val="accent1">
-              <a:shade val="50000"/>
-            </a:schemeClr>
-          </a:lnRef>
-          <a:fillRef idx="1">
-            <a:schemeClr val="accent1"/>
-          </a:fillRef>
-          <a:effectRef idx="0">
-            <a:schemeClr val="accent1"/>
-          </a:effectRef>
-          <a:fontRef idx="minor">
-            <a:schemeClr val="lt1"/>
-          </a:fontRef>
-        </p:style>
-        <p:txBody>
-          <a:bodyPr rtlCol="0" anchor="ctr"/>
-          <a:lstStyle/>
-          <a:p>
-            <a:pPr algn="ctr"/>
-            <a:r>
-              <a:rPr lang="en-US" dirty="0">
-                <a:solidFill>
-                  <a:schemeClr val="accent6">
-                    <a:lumMod val="60000"/>
-                    <a:lumOff val="40000"/>
-                  </a:schemeClr>
-                </a:solidFill>
-              </a:rPr>
-              <a:t>step1</a:t>
-            </a:r>
-          </a:p>
-        </p:txBody>
-      </p:sp>
-      <p:sp>
-        <p:nvSpPr>
-          <p:cNvPr id="8" name="Rectangle 7"/>
-          <p:cNvSpPr/>
-          <p:nvPr/>
-        </p:nvSpPr>
-        <p:spPr>
-          <a:xfrm>
-            <a:off x="5829182" y="5039013"/>
-            <a:ext cx="914400" cy="914400"/>
-          </a:xfrm>
-          <a:prstGeom prst="rect">
-            <a:avLst/>
-          </a:prstGeom>
-        </p:spPr>
-        <p:style>
-          <a:lnRef idx="2">
-            <a:schemeClr val="accent1">
-              <a:shade val="50000"/>
-            </a:schemeClr>
-          </a:lnRef>
-          <a:fillRef idx="1">
-            <a:schemeClr val="accent1"/>
-          </a:fillRef>
-          <a:effectRef idx="0">
-            <a:schemeClr val="accent1"/>
-          </a:effectRef>
-          <a:fontRef idx="minor">
-            <a:schemeClr val="lt1"/>
-          </a:fontRef>
-        </p:style>
-        <p:txBody>
-          <a:bodyPr rtlCol="0" anchor="ctr"/>
-          <a:lstStyle/>
-          <a:p>
-            <a:pPr algn="ctr"/>
-            <a:r>
-              <a:rPr lang="en-US" dirty="0">
-                <a:solidFill>
-                  <a:schemeClr val="accent6">
-                    <a:lumMod val="60000"/>
-                    <a:lumOff val="40000"/>
-                  </a:schemeClr>
-                </a:solidFill>
-              </a:rPr>
-              <a:t>step3</a:t>
-            </a:r>
-          </a:p>
-        </p:txBody>
-      </p:sp>
-      <p:sp>
-        <p:nvSpPr>
-          <p:cNvPr id="9" name="Rectangle 8"/>
-          <p:cNvSpPr/>
-          <p:nvPr/>
-        </p:nvSpPr>
-        <p:spPr>
-          <a:xfrm>
-            <a:off x="7888682" y="5018041"/>
-            <a:ext cx="914400" cy="914400"/>
-          </a:xfrm>
-          <a:prstGeom prst="rect">
-            <a:avLst/>
-          </a:prstGeom>
-        </p:spPr>
-        <p:style>
-          <a:lnRef idx="2">
-            <a:schemeClr val="accent1">
-              <a:shade val="50000"/>
-            </a:schemeClr>
-          </a:lnRef>
-          <a:fillRef idx="1">
-            <a:schemeClr val="accent1"/>
-          </a:fillRef>
-          <a:effectRef idx="0">
-            <a:schemeClr val="accent1"/>
-          </a:effectRef>
-          <a:fontRef idx="minor">
-            <a:schemeClr val="lt1"/>
-          </a:fontRef>
-        </p:style>
-        <p:txBody>
-          <a:bodyPr rtlCol="0" anchor="ctr"/>
-          <a:lstStyle/>
-          <a:p>
-            <a:pPr algn="ctr"/>
-            <a:r>
-              <a:rPr lang="en-US" dirty="0">
-                <a:solidFill>
-                  <a:schemeClr val="accent6">
-                    <a:lumMod val="60000"/>
-                    <a:lumOff val="40000"/>
-                  </a:schemeClr>
-                </a:solidFill>
-              </a:rPr>
-              <a:t>Output</a:t>
-            </a:r>
-          </a:p>
-        </p:txBody>
-      </p:sp>
-      <p:sp>
-        <p:nvSpPr>
-          <p:cNvPr id="10" name="Right Arrow 9"/>
-          <p:cNvSpPr/>
-          <p:nvPr/>
-        </p:nvSpPr>
-        <p:spPr>
-          <a:xfrm>
-            <a:off x="1454315" y="5320045"/>
-            <a:ext cx="570452" cy="243281"/>
-          </a:xfrm>
-          <a:prstGeom prst="rightArrow">
-            <a:avLst/>
-          </a:prstGeom>
-        </p:spPr>
-        <p:style>
-          <a:lnRef idx="2">
-            <a:schemeClr val="accent1">
-              <a:shade val="50000"/>
-            </a:schemeClr>
-          </a:lnRef>
-          <a:fillRef idx="1">
-            <a:schemeClr val="accent1"/>
-          </a:fillRef>
-          <a:effectRef idx="0">
-            <a:schemeClr val="accent1"/>
-          </a:effectRef>
-          <a:fontRef idx="minor">
-            <a:schemeClr val="lt1"/>
-          </a:fontRef>
-        </p:style>
-        <p:txBody>
-          <a:bodyPr rtlCol="0" anchor="ctr"/>
-          <a:lstStyle/>
-          <a:p>
-            <a:pPr algn="ctr"/>
-            <a:endParaRPr lang="en-US">
-              <a:solidFill>
-                <a:schemeClr val="accent6">
-                  <a:lumMod val="60000"/>
-                  <a:lumOff val="40000"/>
-                </a:schemeClr>
-              </a:solidFill>
-            </a:endParaRPr>
-          </a:p>
-        </p:txBody>
-      </p:sp>
-      <p:sp>
-        <p:nvSpPr>
-          <p:cNvPr id="11" name="Right Arrow 10"/>
-          <p:cNvSpPr/>
-          <p:nvPr/>
-        </p:nvSpPr>
-        <p:spPr>
-          <a:xfrm>
-            <a:off x="3418739" y="5388555"/>
-            <a:ext cx="570452" cy="243281"/>
-          </a:xfrm>
-          <a:prstGeom prst="rightArrow">
-            <a:avLst/>
-          </a:prstGeom>
-        </p:spPr>
-        <p:style>
-          <a:lnRef idx="2">
-            <a:schemeClr val="accent1">
-              <a:shade val="50000"/>
-            </a:schemeClr>
-          </a:lnRef>
-          <a:fillRef idx="1">
-            <a:schemeClr val="accent1"/>
-          </a:fillRef>
-          <a:effectRef idx="0">
-            <a:schemeClr val="accent1"/>
-          </a:effectRef>
-          <a:fontRef idx="minor">
-            <a:schemeClr val="lt1"/>
-          </a:fontRef>
-        </p:style>
-        <p:txBody>
-          <a:bodyPr rtlCol="0" anchor="ctr"/>
-          <a:lstStyle/>
-          <a:p>
-            <a:pPr algn="ctr"/>
-            <a:endParaRPr lang="en-US">
-              <a:solidFill>
-                <a:schemeClr val="accent6">
-                  <a:lumMod val="60000"/>
-                  <a:lumOff val="40000"/>
-                </a:schemeClr>
-              </a:solidFill>
-            </a:endParaRPr>
-          </a:p>
-        </p:txBody>
-      </p:sp>
-      <p:sp>
-        <p:nvSpPr>
-          <p:cNvPr id="12" name="Right Arrow 11"/>
-          <p:cNvSpPr/>
-          <p:nvPr/>
-        </p:nvSpPr>
-        <p:spPr>
-          <a:xfrm>
-            <a:off x="5197207" y="5388555"/>
-            <a:ext cx="570452" cy="243281"/>
-          </a:xfrm>
-          <a:prstGeom prst="rightArrow">
-            <a:avLst/>
-          </a:prstGeom>
-        </p:spPr>
-        <p:style>
-          <a:lnRef idx="2">
-            <a:schemeClr val="accent1">
-              <a:shade val="50000"/>
-            </a:schemeClr>
-          </a:lnRef>
-          <a:fillRef idx="1">
-            <a:schemeClr val="accent1"/>
-          </a:fillRef>
-          <a:effectRef idx="0">
-            <a:schemeClr val="accent1"/>
-          </a:effectRef>
-          <a:fontRef idx="minor">
-            <a:schemeClr val="lt1"/>
-          </a:fontRef>
-        </p:style>
-        <p:txBody>
-          <a:bodyPr rtlCol="0" anchor="ctr"/>
-          <a:lstStyle/>
-          <a:p>
-            <a:pPr algn="ctr"/>
-            <a:endParaRPr lang="en-US">
-              <a:solidFill>
-                <a:schemeClr val="accent6">
-                  <a:lumMod val="60000"/>
-                  <a:lumOff val="40000"/>
-                </a:schemeClr>
-              </a:solidFill>
-            </a:endParaRPr>
-          </a:p>
-        </p:txBody>
-      </p:sp>
-      <p:sp>
-        <p:nvSpPr>
-          <p:cNvPr id="13" name="Right Arrow 12"/>
-          <p:cNvSpPr/>
-          <p:nvPr/>
-        </p:nvSpPr>
-        <p:spPr>
-          <a:xfrm>
-            <a:off x="7026009" y="5363388"/>
-            <a:ext cx="570452" cy="243281"/>
-          </a:xfrm>
-          <a:prstGeom prst="rightArrow">
-            <a:avLst/>
-          </a:prstGeom>
-        </p:spPr>
-        <p:style>
-          <a:lnRef idx="2">
-            <a:schemeClr val="accent1">
-              <a:shade val="50000"/>
-            </a:schemeClr>
-          </a:lnRef>
-          <a:fillRef idx="1">
-            <a:schemeClr val="accent1"/>
-          </a:fillRef>
-          <a:effectRef idx="0">
-            <a:schemeClr val="accent1"/>
-          </a:effectRef>
-          <a:fontRef idx="minor">
-            <a:schemeClr val="lt1"/>
-          </a:fontRef>
-        </p:style>
-        <p:txBody>
-          <a:bodyPr rtlCol="0" anchor="ctr"/>
-          <a:lstStyle/>
-          <a:p>
-            <a:pPr algn="ctr"/>
-            <a:endParaRPr lang="en-US">
-              <a:solidFill>
-                <a:schemeClr val="accent6">
-                  <a:lumMod val="60000"/>
-                  <a:lumOff val="40000"/>
-                </a:schemeClr>
-              </a:solidFill>
-            </a:endParaRPr>
-          </a:p>
-        </p:txBody>
-      </p:sp>
-      <p:sp>
-        <p:nvSpPr>
-          <p:cNvPr id="16" name="TextBox 15">
-            <a:extLst>
-              <a:ext uri="{FF2B5EF4-FFF2-40B4-BE49-F238E27FC236}">
-                <a16:creationId xmlns:a16="http://schemas.microsoft.com/office/drawing/2014/main" id="{4C82C3F7-7BBA-E996-1CFA-1BCE3DEA5330}"/>
-              </a:ext>
-            </a:extLst>
-          </p:cNvPr>
-          <p:cNvSpPr txBox="1"/>
-          <p:nvPr/>
-        </p:nvSpPr>
-        <p:spPr>
-          <a:xfrm>
-            <a:off x="178308" y="160002"/>
-            <a:ext cx="6190488" cy="461665"/>
-          </a:xfrm>
-          <a:prstGeom prst="rect">
-            <a:avLst/>
-          </a:prstGeom>
-          <a:noFill/>
-        </p:spPr>
-        <p:txBody>
-          <a:bodyPr wrap="square">
-            <a:spAutoFit/>
-          </a:bodyPr>
-          <a:lstStyle/>
-          <a:p>
-            <a:r>
-              <a:rPr lang="en-US" sz="2400" b="1" dirty="0">
-                <a:solidFill>
-                  <a:schemeClr val="accent6">
-                    <a:lumMod val="60000"/>
-                    <a:lumOff val="40000"/>
-                  </a:schemeClr>
-                </a:solidFill>
-              </a:rPr>
-              <a:t>Example: Booking vacations</a:t>
-            </a:r>
-            <a:endParaRPr lang="en-US" sz="2400" dirty="0">
-              <a:solidFill>
-                <a:schemeClr val="accent6">
-                  <a:lumMod val="60000"/>
-                  <a:lumOff val="40000"/>
-                </a:schemeClr>
-              </a:solidFill>
-            </a:endParaRPr>
-          </a:p>
-        </p:txBody>
-      </p:sp>
-    </p:spTree>
-    <p:extLst>
-      <p:ext uri="{BB962C8B-B14F-4D97-AF65-F5344CB8AC3E}">
-        <p14:creationId xmlns:p14="http://schemas.microsoft.com/office/powerpoint/2010/main" val="21285464"/>
       </p:ext>
     </p:extLst>
   </p:cSld>
@@ -10834,6 +11188,665 @@
 </file>
 
 <file path=ppt/slides/slide20.xml><?xml version="1.0" encoding="utf-8"?>
+<p:sld xmlns:a="http://schemas.openxmlformats.org/drawingml/2006/main" xmlns:r="http://schemas.openxmlformats.org/officeDocument/2006/relationships" xmlns:p="http://schemas.openxmlformats.org/presentationml/2006/main">
+  <p:cSld>
+    <p:spTree>
+      <p:nvGrpSpPr>
+        <p:cNvPr id="1" name=""/>
+        <p:cNvGrpSpPr/>
+        <p:nvPr/>
+      </p:nvGrpSpPr>
+      <p:grpSpPr>
+        <a:xfrm>
+          <a:off x="0" y="0"/>
+          <a:ext cx="0" cy="0"/>
+          <a:chOff x="0" y="0"/>
+          <a:chExt cx="0" cy="0"/>
+        </a:xfrm>
+      </p:grpSpPr>
+      <p:sp>
+        <p:nvSpPr>
+          <p:cNvPr id="4" name="TextBox 3"/>
+          <p:cNvSpPr txBox="1"/>
+          <p:nvPr/>
+        </p:nvSpPr>
+        <p:spPr>
+          <a:xfrm>
+            <a:off x="197050" y="719400"/>
+            <a:ext cx="11797900" cy="3785652"/>
+          </a:xfrm>
+          <a:prstGeom prst="rect">
+            <a:avLst/>
+          </a:prstGeom>
+          <a:noFill/>
+        </p:spPr>
+        <p:txBody>
+          <a:bodyPr wrap="square" rtlCol="0">
+            <a:spAutoFit/>
+          </a:bodyPr>
+          <a:lstStyle/>
+          <a:p>
+            <a:r>
+              <a:rPr lang="en-US" sz="2400" dirty="0">
+                <a:solidFill>
+                  <a:schemeClr val="accent6">
+                    <a:lumMod val="60000"/>
+                    <a:lumOff val="40000"/>
+                  </a:schemeClr>
+                </a:solidFill>
+              </a:rPr>
+              <a:t>Imagine you're trying to book a vacation. </a:t>
+            </a:r>
+          </a:p>
+          <a:p>
+            <a:r>
+              <a:rPr lang="en-US" sz="2400" dirty="0">
+                <a:solidFill>
+                  <a:schemeClr val="accent6">
+                    <a:lumMod val="60000"/>
+                    <a:lumOff val="40000"/>
+                  </a:schemeClr>
+                </a:solidFill>
+              </a:rPr>
+              <a:t>You need to research flights -&gt; find hotels -&gt; check restaurant reviews -&gt; and keep track of your budget.</a:t>
+            </a:r>
+          </a:p>
+          <a:p>
+            <a:endParaRPr lang="en-US" sz="2400" b="1" dirty="0">
+              <a:solidFill>
+                <a:schemeClr val="accent6">
+                  <a:lumMod val="60000"/>
+                  <a:lumOff val="40000"/>
+                </a:schemeClr>
+              </a:solidFill>
+            </a:endParaRPr>
+          </a:p>
+          <a:p>
+            <a:r>
+              <a:rPr lang="en-US" sz="2400" b="1" u="sng" dirty="0">
+                <a:solidFill>
+                  <a:schemeClr val="accent6">
+                    <a:lumMod val="60000"/>
+                    <a:lumOff val="40000"/>
+                  </a:schemeClr>
+                </a:solidFill>
+              </a:rPr>
+              <a:t>Traditional workflow automation</a:t>
+            </a:r>
+            <a:endParaRPr lang="en-US" sz="2400" u="sng" dirty="0">
+              <a:solidFill>
+                <a:schemeClr val="accent6">
+                  <a:lumMod val="60000"/>
+                  <a:lumOff val="40000"/>
+                </a:schemeClr>
+              </a:solidFill>
+            </a:endParaRPr>
+          </a:p>
+          <a:p>
+            <a:r>
+              <a:rPr lang="en-US" sz="2400" dirty="0">
+                <a:solidFill>
+                  <a:schemeClr val="accent6">
+                    <a:lumMod val="60000"/>
+                    <a:lumOff val="40000"/>
+                  </a:schemeClr>
+                </a:solidFill>
+              </a:rPr>
+              <a:t>A traditional automation system follows a predetermined sequence: </a:t>
+            </a:r>
+          </a:p>
+          <a:p>
+            <a:r>
+              <a:rPr lang="en-US" sz="2400" dirty="0">
+                <a:solidFill>
+                  <a:schemeClr val="accent6">
+                    <a:lumMod val="60000"/>
+                    <a:lumOff val="40000"/>
+                  </a:schemeClr>
+                </a:solidFill>
+              </a:rPr>
+              <a:t>It takes inputs such as </a:t>
+            </a:r>
+            <a:r>
+              <a:rPr lang="en-US" sz="2400" b="1" i="1" dirty="0">
+                <a:solidFill>
+                  <a:schemeClr val="accent6">
+                    <a:lumMod val="60000"/>
+                    <a:lumOff val="40000"/>
+                  </a:schemeClr>
+                </a:solidFill>
+              </a:rPr>
+              <a:t>dates, location, and budget</a:t>
+            </a:r>
+            <a:r>
+              <a:rPr lang="en-US" sz="2400" dirty="0">
+                <a:solidFill>
+                  <a:schemeClr val="accent6">
+                    <a:lumMod val="60000"/>
+                    <a:lumOff val="40000"/>
+                  </a:schemeClr>
+                </a:solidFill>
+              </a:rPr>
+              <a:t>, and make calls to predefined APIs in a fixed order. </a:t>
+            </a:r>
+          </a:p>
+          <a:p>
+            <a:r>
+              <a:rPr lang="en-US" sz="2400" dirty="0">
+                <a:solidFill>
+                  <a:schemeClr val="accent6">
+                    <a:lumMod val="60000"/>
+                    <a:lumOff val="40000"/>
+                  </a:schemeClr>
+                </a:solidFill>
+              </a:rPr>
+              <a:t>However, if any unexpected situations arise, such as flights being sold out, or the specified hotels being unavailable, it cannot adapt.</a:t>
+            </a:r>
+          </a:p>
+        </p:txBody>
+      </p:sp>
+      <p:sp>
+        <p:nvSpPr>
+          <p:cNvPr id="5" name="Rectangle 4"/>
+          <p:cNvSpPr/>
+          <p:nvPr/>
+        </p:nvSpPr>
+        <p:spPr>
+          <a:xfrm>
+            <a:off x="4147188" y="5018041"/>
+            <a:ext cx="914400" cy="914400"/>
+          </a:xfrm>
+          <a:prstGeom prst="rect">
+            <a:avLst/>
+          </a:prstGeom>
+        </p:spPr>
+        <p:style>
+          <a:lnRef idx="2">
+            <a:schemeClr val="accent1">
+              <a:shade val="50000"/>
+            </a:schemeClr>
+          </a:lnRef>
+          <a:fillRef idx="1">
+            <a:schemeClr val="accent1"/>
+          </a:fillRef>
+          <a:effectRef idx="0">
+            <a:schemeClr val="accent1"/>
+          </a:effectRef>
+          <a:fontRef idx="minor">
+            <a:schemeClr val="lt1"/>
+          </a:fontRef>
+        </p:style>
+        <p:txBody>
+          <a:bodyPr rtlCol="0" anchor="ctr"/>
+          <a:lstStyle/>
+          <a:p>
+            <a:pPr algn="ctr"/>
+            <a:r>
+              <a:rPr lang="en-US" dirty="0">
+                <a:solidFill>
+                  <a:schemeClr val="accent6">
+                    <a:lumMod val="60000"/>
+                    <a:lumOff val="40000"/>
+                  </a:schemeClr>
+                </a:solidFill>
+              </a:rPr>
+              <a:t>step2</a:t>
+            </a:r>
+          </a:p>
+        </p:txBody>
+      </p:sp>
+      <p:sp>
+        <p:nvSpPr>
+          <p:cNvPr id="6" name="Rectangle 5"/>
+          <p:cNvSpPr/>
+          <p:nvPr/>
+        </p:nvSpPr>
+        <p:spPr>
+          <a:xfrm>
+            <a:off x="407092" y="5019439"/>
+            <a:ext cx="914400" cy="914400"/>
+          </a:xfrm>
+          <a:prstGeom prst="rect">
+            <a:avLst/>
+          </a:prstGeom>
+        </p:spPr>
+        <p:style>
+          <a:lnRef idx="2">
+            <a:schemeClr val="accent1">
+              <a:shade val="50000"/>
+            </a:schemeClr>
+          </a:lnRef>
+          <a:fillRef idx="1">
+            <a:schemeClr val="accent1"/>
+          </a:fillRef>
+          <a:effectRef idx="0">
+            <a:schemeClr val="accent1"/>
+          </a:effectRef>
+          <a:fontRef idx="minor">
+            <a:schemeClr val="lt1"/>
+          </a:fontRef>
+        </p:style>
+        <p:txBody>
+          <a:bodyPr rtlCol="0" anchor="ctr"/>
+          <a:lstStyle/>
+          <a:p>
+            <a:pPr algn="ctr"/>
+            <a:r>
+              <a:rPr lang="en-US" dirty="0">
+                <a:solidFill>
+                  <a:schemeClr val="accent6">
+                    <a:lumMod val="60000"/>
+                    <a:lumOff val="40000"/>
+                  </a:schemeClr>
+                </a:solidFill>
+              </a:rPr>
+              <a:t>Input</a:t>
+            </a:r>
+          </a:p>
+        </p:txBody>
+      </p:sp>
+      <p:sp>
+        <p:nvSpPr>
+          <p:cNvPr id="7" name="Rectangle 6"/>
+          <p:cNvSpPr/>
+          <p:nvPr/>
+        </p:nvSpPr>
+        <p:spPr>
+          <a:xfrm>
+            <a:off x="2273639" y="5106126"/>
+            <a:ext cx="914400" cy="914400"/>
+          </a:xfrm>
+          <a:prstGeom prst="rect">
+            <a:avLst/>
+          </a:prstGeom>
+        </p:spPr>
+        <p:style>
+          <a:lnRef idx="2">
+            <a:schemeClr val="accent1">
+              <a:shade val="50000"/>
+            </a:schemeClr>
+          </a:lnRef>
+          <a:fillRef idx="1">
+            <a:schemeClr val="accent1"/>
+          </a:fillRef>
+          <a:effectRef idx="0">
+            <a:schemeClr val="accent1"/>
+          </a:effectRef>
+          <a:fontRef idx="minor">
+            <a:schemeClr val="lt1"/>
+          </a:fontRef>
+        </p:style>
+        <p:txBody>
+          <a:bodyPr rtlCol="0" anchor="ctr"/>
+          <a:lstStyle/>
+          <a:p>
+            <a:pPr algn="ctr"/>
+            <a:r>
+              <a:rPr lang="en-US" dirty="0">
+                <a:solidFill>
+                  <a:schemeClr val="accent6">
+                    <a:lumMod val="60000"/>
+                    <a:lumOff val="40000"/>
+                  </a:schemeClr>
+                </a:solidFill>
+              </a:rPr>
+              <a:t>step1</a:t>
+            </a:r>
+          </a:p>
+        </p:txBody>
+      </p:sp>
+      <p:sp>
+        <p:nvSpPr>
+          <p:cNvPr id="8" name="Rectangle 7"/>
+          <p:cNvSpPr/>
+          <p:nvPr/>
+        </p:nvSpPr>
+        <p:spPr>
+          <a:xfrm>
+            <a:off x="5829182" y="5039013"/>
+            <a:ext cx="914400" cy="914400"/>
+          </a:xfrm>
+          <a:prstGeom prst="rect">
+            <a:avLst/>
+          </a:prstGeom>
+        </p:spPr>
+        <p:style>
+          <a:lnRef idx="2">
+            <a:schemeClr val="accent1">
+              <a:shade val="50000"/>
+            </a:schemeClr>
+          </a:lnRef>
+          <a:fillRef idx="1">
+            <a:schemeClr val="accent1"/>
+          </a:fillRef>
+          <a:effectRef idx="0">
+            <a:schemeClr val="accent1"/>
+          </a:effectRef>
+          <a:fontRef idx="minor">
+            <a:schemeClr val="lt1"/>
+          </a:fontRef>
+        </p:style>
+        <p:txBody>
+          <a:bodyPr rtlCol="0" anchor="ctr"/>
+          <a:lstStyle/>
+          <a:p>
+            <a:pPr algn="ctr"/>
+            <a:r>
+              <a:rPr lang="en-US" dirty="0">
+                <a:solidFill>
+                  <a:schemeClr val="accent6">
+                    <a:lumMod val="60000"/>
+                    <a:lumOff val="40000"/>
+                  </a:schemeClr>
+                </a:solidFill>
+              </a:rPr>
+              <a:t>step3</a:t>
+            </a:r>
+          </a:p>
+        </p:txBody>
+      </p:sp>
+      <p:sp>
+        <p:nvSpPr>
+          <p:cNvPr id="9" name="Rectangle 8"/>
+          <p:cNvSpPr/>
+          <p:nvPr/>
+        </p:nvSpPr>
+        <p:spPr>
+          <a:xfrm>
+            <a:off x="7888682" y="5018041"/>
+            <a:ext cx="914400" cy="914400"/>
+          </a:xfrm>
+          <a:prstGeom prst="rect">
+            <a:avLst/>
+          </a:prstGeom>
+        </p:spPr>
+        <p:style>
+          <a:lnRef idx="2">
+            <a:schemeClr val="accent1">
+              <a:shade val="50000"/>
+            </a:schemeClr>
+          </a:lnRef>
+          <a:fillRef idx="1">
+            <a:schemeClr val="accent1"/>
+          </a:fillRef>
+          <a:effectRef idx="0">
+            <a:schemeClr val="accent1"/>
+          </a:effectRef>
+          <a:fontRef idx="minor">
+            <a:schemeClr val="lt1"/>
+          </a:fontRef>
+        </p:style>
+        <p:txBody>
+          <a:bodyPr rtlCol="0" anchor="ctr"/>
+          <a:lstStyle/>
+          <a:p>
+            <a:pPr algn="ctr"/>
+            <a:r>
+              <a:rPr lang="en-US" dirty="0">
+                <a:solidFill>
+                  <a:schemeClr val="accent6">
+                    <a:lumMod val="60000"/>
+                    <a:lumOff val="40000"/>
+                  </a:schemeClr>
+                </a:solidFill>
+              </a:rPr>
+              <a:t>Output</a:t>
+            </a:r>
+          </a:p>
+        </p:txBody>
+      </p:sp>
+      <p:sp>
+        <p:nvSpPr>
+          <p:cNvPr id="10" name="Right Arrow 9"/>
+          <p:cNvSpPr/>
+          <p:nvPr/>
+        </p:nvSpPr>
+        <p:spPr>
+          <a:xfrm>
+            <a:off x="1454315" y="5320045"/>
+            <a:ext cx="570452" cy="243281"/>
+          </a:xfrm>
+          <a:prstGeom prst="rightArrow">
+            <a:avLst/>
+          </a:prstGeom>
+        </p:spPr>
+        <p:style>
+          <a:lnRef idx="2">
+            <a:schemeClr val="accent1">
+              <a:shade val="50000"/>
+            </a:schemeClr>
+          </a:lnRef>
+          <a:fillRef idx="1">
+            <a:schemeClr val="accent1"/>
+          </a:fillRef>
+          <a:effectRef idx="0">
+            <a:schemeClr val="accent1"/>
+          </a:effectRef>
+          <a:fontRef idx="minor">
+            <a:schemeClr val="lt1"/>
+          </a:fontRef>
+        </p:style>
+        <p:txBody>
+          <a:bodyPr rtlCol="0" anchor="ctr"/>
+          <a:lstStyle/>
+          <a:p>
+            <a:pPr algn="ctr"/>
+            <a:endParaRPr lang="en-US">
+              <a:solidFill>
+                <a:schemeClr val="accent6">
+                  <a:lumMod val="60000"/>
+                  <a:lumOff val="40000"/>
+                </a:schemeClr>
+              </a:solidFill>
+            </a:endParaRPr>
+          </a:p>
+        </p:txBody>
+      </p:sp>
+      <p:sp>
+        <p:nvSpPr>
+          <p:cNvPr id="11" name="Right Arrow 10"/>
+          <p:cNvSpPr/>
+          <p:nvPr/>
+        </p:nvSpPr>
+        <p:spPr>
+          <a:xfrm>
+            <a:off x="3418739" y="5388555"/>
+            <a:ext cx="570452" cy="243281"/>
+          </a:xfrm>
+          <a:prstGeom prst="rightArrow">
+            <a:avLst/>
+          </a:prstGeom>
+        </p:spPr>
+        <p:style>
+          <a:lnRef idx="2">
+            <a:schemeClr val="accent1">
+              <a:shade val="50000"/>
+            </a:schemeClr>
+          </a:lnRef>
+          <a:fillRef idx="1">
+            <a:schemeClr val="accent1"/>
+          </a:fillRef>
+          <a:effectRef idx="0">
+            <a:schemeClr val="accent1"/>
+          </a:effectRef>
+          <a:fontRef idx="minor">
+            <a:schemeClr val="lt1"/>
+          </a:fontRef>
+        </p:style>
+        <p:txBody>
+          <a:bodyPr rtlCol="0" anchor="ctr"/>
+          <a:lstStyle/>
+          <a:p>
+            <a:pPr algn="ctr"/>
+            <a:endParaRPr lang="en-US">
+              <a:solidFill>
+                <a:schemeClr val="accent6">
+                  <a:lumMod val="60000"/>
+                  <a:lumOff val="40000"/>
+                </a:schemeClr>
+              </a:solidFill>
+            </a:endParaRPr>
+          </a:p>
+        </p:txBody>
+      </p:sp>
+      <p:sp>
+        <p:nvSpPr>
+          <p:cNvPr id="12" name="Right Arrow 11"/>
+          <p:cNvSpPr/>
+          <p:nvPr/>
+        </p:nvSpPr>
+        <p:spPr>
+          <a:xfrm>
+            <a:off x="5197207" y="5388555"/>
+            <a:ext cx="570452" cy="243281"/>
+          </a:xfrm>
+          <a:prstGeom prst="rightArrow">
+            <a:avLst/>
+          </a:prstGeom>
+        </p:spPr>
+        <p:style>
+          <a:lnRef idx="2">
+            <a:schemeClr val="accent1">
+              <a:shade val="50000"/>
+            </a:schemeClr>
+          </a:lnRef>
+          <a:fillRef idx="1">
+            <a:schemeClr val="accent1"/>
+          </a:fillRef>
+          <a:effectRef idx="0">
+            <a:schemeClr val="accent1"/>
+          </a:effectRef>
+          <a:fontRef idx="minor">
+            <a:schemeClr val="lt1"/>
+          </a:fontRef>
+        </p:style>
+        <p:txBody>
+          <a:bodyPr rtlCol="0" anchor="ctr"/>
+          <a:lstStyle/>
+          <a:p>
+            <a:pPr algn="ctr"/>
+            <a:endParaRPr lang="en-US">
+              <a:solidFill>
+                <a:schemeClr val="accent6">
+                  <a:lumMod val="60000"/>
+                  <a:lumOff val="40000"/>
+                </a:schemeClr>
+              </a:solidFill>
+            </a:endParaRPr>
+          </a:p>
+        </p:txBody>
+      </p:sp>
+      <p:sp>
+        <p:nvSpPr>
+          <p:cNvPr id="13" name="Right Arrow 12"/>
+          <p:cNvSpPr/>
+          <p:nvPr/>
+        </p:nvSpPr>
+        <p:spPr>
+          <a:xfrm>
+            <a:off x="7026009" y="5363388"/>
+            <a:ext cx="570452" cy="243281"/>
+          </a:xfrm>
+          <a:prstGeom prst="rightArrow">
+            <a:avLst/>
+          </a:prstGeom>
+        </p:spPr>
+        <p:style>
+          <a:lnRef idx="2">
+            <a:schemeClr val="accent1">
+              <a:shade val="50000"/>
+            </a:schemeClr>
+          </a:lnRef>
+          <a:fillRef idx="1">
+            <a:schemeClr val="accent1"/>
+          </a:fillRef>
+          <a:effectRef idx="0">
+            <a:schemeClr val="accent1"/>
+          </a:effectRef>
+          <a:fontRef idx="minor">
+            <a:schemeClr val="lt1"/>
+          </a:fontRef>
+        </p:style>
+        <p:txBody>
+          <a:bodyPr rtlCol="0" anchor="ctr"/>
+          <a:lstStyle/>
+          <a:p>
+            <a:pPr algn="ctr"/>
+            <a:endParaRPr lang="en-US">
+              <a:solidFill>
+                <a:schemeClr val="accent6">
+                  <a:lumMod val="60000"/>
+                  <a:lumOff val="40000"/>
+                </a:schemeClr>
+              </a:solidFill>
+            </a:endParaRPr>
+          </a:p>
+        </p:txBody>
+      </p:sp>
+      <p:sp>
+        <p:nvSpPr>
+          <p:cNvPr id="16" name="TextBox 15">
+            <a:extLst>
+              <a:ext uri="{FF2B5EF4-FFF2-40B4-BE49-F238E27FC236}">
+                <a16:creationId xmlns:a16="http://schemas.microsoft.com/office/drawing/2014/main" id="{4C82C3F7-7BBA-E996-1CFA-1BCE3DEA5330}"/>
+              </a:ext>
+            </a:extLst>
+          </p:cNvPr>
+          <p:cNvSpPr txBox="1"/>
+          <p:nvPr/>
+        </p:nvSpPr>
+        <p:spPr>
+          <a:xfrm>
+            <a:off x="178308" y="160002"/>
+            <a:ext cx="6190488" cy="461665"/>
+          </a:xfrm>
+          <a:prstGeom prst="rect">
+            <a:avLst/>
+          </a:prstGeom>
+          <a:noFill/>
+        </p:spPr>
+        <p:txBody>
+          <a:bodyPr wrap="square">
+            <a:spAutoFit/>
+          </a:bodyPr>
+          <a:lstStyle/>
+          <a:p>
+            <a:r>
+              <a:rPr lang="en-US" sz="2400" b="1" dirty="0">
+                <a:solidFill>
+                  <a:schemeClr val="accent6">
+                    <a:lumMod val="60000"/>
+                    <a:lumOff val="40000"/>
+                  </a:schemeClr>
+                </a:solidFill>
+              </a:rPr>
+              <a:t>Example: Booking vacations</a:t>
+            </a:r>
+            <a:endParaRPr lang="en-US" sz="2400" dirty="0">
+              <a:solidFill>
+                <a:schemeClr val="accent6">
+                  <a:lumMod val="60000"/>
+                  <a:lumOff val="40000"/>
+                </a:schemeClr>
+              </a:solidFill>
+            </a:endParaRPr>
+          </a:p>
+        </p:txBody>
+      </p:sp>
+    </p:spTree>
+    <p:extLst>
+      <p:ext uri="{BB962C8B-B14F-4D97-AF65-F5344CB8AC3E}">
+        <p14:creationId xmlns:p14="http://schemas.microsoft.com/office/powerpoint/2010/main" val="21285464"/>
+      </p:ext>
+    </p:extLst>
+  </p:cSld>
+  <p:clrMapOvr>
+    <a:masterClrMapping/>
+  </p:clrMapOvr>
+</p:sld>
+</file>
+
+<file path=ppt/slides/slide21.xml><?xml version="1.0" encoding="utf-8"?>
 <p:sld xmlns:a="http://schemas.openxmlformats.org/drawingml/2006/main" xmlns:r="http://schemas.openxmlformats.org/officeDocument/2006/relationships" xmlns:p="http://schemas.openxmlformats.org/presentationml/2006/main">
   <p:cSld>
     <p:spTree>
@@ -12997,7 +14010,7 @@
 </p:sld>
 </file>
 
-<file path=ppt/slides/slide21.xml><?xml version="1.0" encoding="utf-8"?>
+<file path=ppt/slides/slide22.xml><?xml version="1.0" encoding="utf-8"?>
 <p:sld xmlns:a="http://schemas.openxmlformats.org/drawingml/2006/main" xmlns:r="http://schemas.openxmlformats.org/officeDocument/2006/relationships" xmlns:p="http://schemas.openxmlformats.org/presentationml/2006/main">
   <p:cSld>
     <p:spTree>
@@ -13353,7 +14366,7 @@
 </p:sld>
 </file>
 
-<file path=ppt/slides/slide22.xml><?xml version="1.0" encoding="utf-8"?>
+<file path=ppt/slides/slide23.xml><?xml version="1.0" encoding="utf-8"?>
 <p:sld xmlns:a="http://schemas.openxmlformats.org/drawingml/2006/main" xmlns:r="http://schemas.openxmlformats.org/officeDocument/2006/relationships" xmlns:p="http://schemas.openxmlformats.org/presentationml/2006/main">
   <p:cSld>
     <p:spTree>
@@ -13440,7 +14453,7 @@
 </p:sld>
 </file>
 
-<file path=ppt/slides/slide23.xml><?xml version="1.0" encoding="utf-8"?>
+<file path=ppt/slides/slide24.xml><?xml version="1.0" encoding="utf-8"?>
 <p:sld xmlns:a="http://schemas.openxmlformats.org/drawingml/2006/main" xmlns:r="http://schemas.openxmlformats.org/officeDocument/2006/relationships" xmlns:p="http://schemas.openxmlformats.org/presentationml/2006/main">
   <p:cSld>
     <p:spTree>
@@ -13674,7 +14687,7 @@
 </p:sld>
 </file>
 
-<file path=ppt/slides/slide24.xml><?xml version="1.0" encoding="utf-8"?>
+<file path=ppt/slides/slide25.xml><?xml version="1.0" encoding="utf-8"?>
 <p:sld xmlns:a="http://schemas.openxmlformats.org/drawingml/2006/main" xmlns:r="http://schemas.openxmlformats.org/officeDocument/2006/relationships" xmlns:p="http://schemas.openxmlformats.org/presentationml/2006/main">
   <p:cSld>
     <p:spTree>
@@ -13900,7 +14913,7 @@
 </p:sld>
 </file>
 
-<file path=ppt/slides/slide25.xml><?xml version="1.0" encoding="utf-8"?>
+<file path=ppt/slides/slide26.xml><?xml version="1.0" encoding="utf-8"?>
 <p:sld xmlns:a="http://schemas.openxmlformats.org/drawingml/2006/main" xmlns:r="http://schemas.openxmlformats.org/officeDocument/2006/relationships" xmlns:p="http://schemas.openxmlformats.org/presentationml/2006/main">
   <p:cSld>
     <p:spTree>
@@ -14207,7 +15220,7 @@
 </p:sld>
 </file>
 
-<file path=ppt/slides/slide26.xml><?xml version="1.0" encoding="utf-8"?>
+<file path=ppt/slides/slide27.xml><?xml version="1.0" encoding="utf-8"?>
 <p:sld xmlns:a="http://schemas.openxmlformats.org/drawingml/2006/main" xmlns:r="http://schemas.openxmlformats.org/officeDocument/2006/relationships" xmlns:p="http://schemas.openxmlformats.org/presentationml/2006/main">
   <p:cSld>
     <p:spTree>
@@ -14461,7 +15474,7 @@
 </p:sld>
 </file>
 
-<file path=ppt/slides/slide27.xml><?xml version="1.0" encoding="utf-8"?>
+<file path=ppt/slides/slide28.xml><?xml version="1.0" encoding="utf-8"?>
 <p:sld xmlns:a="http://schemas.openxmlformats.org/drawingml/2006/main" xmlns:r="http://schemas.openxmlformats.org/officeDocument/2006/relationships" xmlns:p="http://schemas.openxmlformats.org/presentationml/2006/main">
   <p:cSld>
     <p:spTree>
@@ -14685,7 +15698,7 @@
 </p:sld>
 </file>
 
-<file path=ppt/slides/slide28.xml><?xml version="1.0" encoding="utf-8"?>
+<file path=ppt/slides/slide29.xml><?xml version="1.0" encoding="utf-8"?>
 <p:sld xmlns:a="http://schemas.openxmlformats.org/drawingml/2006/main" xmlns:r="http://schemas.openxmlformats.org/officeDocument/2006/relationships" xmlns:p="http://schemas.openxmlformats.org/presentationml/2006/main">
   <p:cSld>
     <p:spTree>
@@ -14925,42 +15938,6 @@
     <p:extLst>
       <p:ext uri="{BB962C8B-B14F-4D97-AF65-F5344CB8AC3E}">
         <p14:creationId xmlns:p14="http://schemas.microsoft.com/office/powerpoint/2010/main" val="1959769086"/>
-      </p:ext>
-    </p:extLst>
-  </p:cSld>
-  <p:clrMapOvr>
-    <a:masterClrMapping/>
-  </p:clrMapOvr>
-</p:sld>
-</file>
-
-<file path=ppt/slides/slide29.xml><?xml version="1.0" encoding="utf-8"?>
-<p:sld xmlns:a="http://schemas.openxmlformats.org/drawingml/2006/main" xmlns:r="http://schemas.openxmlformats.org/officeDocument/2006/relationships" xmlns:p="http://schemas.openxmlformats.org/presentationml/2006/main">
-  <p:cSld>
-    <p:spTree>
-      <p:nvGrpSpPr>
-        <p:cNvPr id="1" name="">
-          <a:extLst>
-            <a:ext uri="{FF2B5EF4-FFF2-40B4-BE49-F238E27FC236}">
-              <a16:creationId xmlns:a16="http://schemas.microsoft.com/office/drawing/2014/main" id="{BFC48961-3A2F-397E-527E-49BDBE14D6DE}"/>
-            </a:ext>
-          </a:extLst>
-        </p:cNvPr>
-        <p:cNvGrpSpPr/>
-        <p:nvPr/>
-      </p:nvGrpSpPr>
-      <p:grpSpPr>
-        <a:xfrm>
-          <a:off x="0" y="0"/>
-          <a:ext cx="0" cy="0"/>
-          <a:chOff x="0" y="0"/>
-          <a:chExt cx="0" cy="0"/>
-        </a:xfrm>
-      </p:grpSpPr>
-    </p:spTree>
-    <p:extLst>
-      <p:ext uri="{BB962C8B-B14F-4D97-AF65-F5344CB8AC3E}">
-        <p14:creationId xmlns:p14="http://schemas.microsoft.com/office/powerpoint/2010/main" val="1608578028"/>
       </p:ext>
     </p:extLst>
   </p:cSld>
@@ -15484,6 +16461,42 @@
 </file>
 
 <file path=ppt/slides/slide30.xml><?xml version="1.0" encoding="utf-8"?>
+<p:sld xmlns:a="http://schemas.openxmlformats.org/drawingml/2006/main" xmlns:r="http://schemas.openxmlformats.org/officeDocument/2006/relationships" xmlns:p="http://schemas.openxmlformats.org/presentationml/2006/main">
+  <p:cSld>
+    <p:spTree>
+      <p:nvGrpSpPr>
+        <p:cNvPr id="1" name="">
+          <a:extLst>
+            <a:ext uri="{FF2B5EF4-FFF2-40B4-BE49-F238E27FC236}">
+              <a16:creationId xmlns:a16="http://schemas.microsoft.com/office/drawing/2014/main" id="{BFC48961-3A2F-397E-527E-49BDBE14D6DE}"/>
+            </a:ext>
+          </a:extLst>
+        </p:cNvPr>
+        <p:cNvGrpSpPr/>
+        <p:nvPr/>
+      </p:nvGrpSpPr>
+      <p:grpSpPr>
+        <a:xfrm>
+          <a:off x="0" y="0"/>
+          <a:ext cx="0" cy="0"/>
+          <a:chOff x="0" y="0"/>
+          <a:chExt cx="0" cy="0"/>
+        </a:xfrm>
+      </p:grpSpPr>
+    </p:spTree>
+    <p:extLst>
+      <p:ext uri="{BB962C8B-B14F-4D97-AF65-F5344CB8AC3E}">
+        <p14:creationId xmlns:p14="http://schemas.microsoft.com/office/powerpoint/2010/main" val="1608578028"/>
+      </p:ext>
+    </p:extLst>
+  </p:cSld>
+  <p:clrMapOvr>
+    <a:masterClrMapping/>
+  </p:clrMapOvr>
+</p:sld>
+</file>
+
+<file path=ppt/slides/slide31.xml><?xml version="1.0" encoding="utf-8"?>
 <p:sld xmlns:a="http://schemas.openxmlformats.org/drawingml/2006/main" xmlns:r="http://schemas.openxmlformats.org/officeDocument/2006/relationships" xmlns:p="http://schemas.openxmlformats.org/presentationml/2006/main">
   <p:cSld>
     <p:spTree>
@@ -15888,7 +16901,7 @@
         <p:spPr>
           <a:xfrm>
             <a:off x="292608" y="204276"/>
-            <a:ext cx="6894576" cy="6370975"/>
+            <a:ext cx="6894576" cy="5632311"/>
           </a:xfrm>
           <a:prstGeom prst="rect">
             <a:avLst/>
@@ -15990,7 +17003,29 @@
                   </a:schemeClr>
                 </a:solidFill>
               </a:rPr>
-              <a:t>When the agent decides it needs information or needs to do something it can't do purely from memory, it issues a structured call to a tool — passing in parameters — and waits for a result to come back before continuing.</a:t>
+              <a:t>When the agent decides it needs information or needs to do something </a:t>
+            </a:r>
+            <a:r>
+              <a:rPr lang="en-US" sz="2400">
+                <a:solidFill>
+                  <a:schemeClr val="accent6">
+                    <a:lumMod val="60000"/>
+                    <a:lumOff val="40000"/>
+                  </a:schemeClr>
+                </a:solidFill>
+              </a:rPr>
+              <a:t>it calls a </a:t>
+            </a:r>
+            <a:r>
+              <a:rPr lang="en-US" sz="2400" dirty="0">
+                <a:solidFill>
+                  <a:schemeClr val="accent6">
+                    <a:lumMod val="60000"/>
+                    <a:lumOff val="40000"/>
+                  </a:schemeClr>
+                </a:solidFill>
+              </a:rPr>
+              <a:t>tool and waits for a result to come back before continuing.</a:t>
             </a:r>
           </a:p>
           <a:p>
@@ -16170,6 +17205,364 @@
 </file>
 
 <file path=ppt/slides/slide6.xml><?xml version="1.0" encoding="utf-8"?>
+<p:sld xmlns:a="http://schemas.openxmlformats.org/drawingml/2006/main" xmlns:r="http://schemas.openxmlformats.org/officeDocument/2006/relationships" xmlns:p="http://schemas.openxmlformats.org/presentationml/2006/main">
+  <p:cSld>
+    <p:spTree>
+      <p:nvGrpSpPr>
+        <p:cNvPr id="1" name="">
+          <a:extLst>
+            <a:ext uri="{FF2B5EF4-FFF2-40B4-BE49-F238E27FC236}">
+              <a16:creationId xmlns:a16="http://schemas.microsoft.com/office/drawing/2014/main" id="{FDAFE523-C59E-BE66-FB45-55A41DB8B78D}"/>
+            </a:ext>
+          </a:extLst>
+        </p:cNvPr>
+        <p:cNvGrpSpPr/>
+        <p:nvPr/>
+      </p:nvGrpSpPr>
+      <p:grpSpPr>
+        <a:xfrm>
+          <a:off x="0" y="0"/>
+          <a:ext cx="0" cy="0"/>
+          <a:chOff x="0" y="0"/>
+          <a:chExt cx="0" cy="0"/>
+        </a:xfrm>
+      </p:grpSpPr>
+      <p:sp>
+        <p:nvSpPr>
+          <p:cNvPr id="5" name="TextBox 4">
+            <a:extLst>
+              <a:ext uri="{FF2B5EF4-FFF2-40B4-BE49-F238E27FC236}">
+                <a16:creationId xmlns:a16="http://schemas.microsoft.com/office/drawing/2014/main" id="{506B0777-2192-34FB-C503-37DE269783B4}"/>
+              </a:ext>
+            </a:extLst>
+          </p:cNvPr>
+          <p:cNvSpPr txBox="1"/>
+          <p:nvPr/>
+        </p:nvSpPr>
+        <p:spPr>
+          <a:xfrm>
+            <a:off x="292608" y="204276"/>
+            <a:ext cx="6894576" cy="461665"/>
+          </a:xfrm>
+          <a:prstGeom prst="rect">
+            <a:avLst/>
+          </a:prstGeom>
+          <a:noFill/>
+        </p:spPr>
+        <p:txBody>
+          <a:bodyPr wrap="square">
+            <a:spAutoFit/>
+          </a:bodyPr>
+          <a:lstStyle/>
+          <a:p>
+            <a:r>
+              <a:rPr lang="en-US" sz="2400" b="1" u="sng" dirty="0">
+                <a:solidFill>
+                  <a:schemeClr val="accent6">
+                    <a:lumMod val="60000"/>
+                    <a:lumOff val="40000"/>
+                  </a:schemeClr>
+                </a:solidFill>
+              </a:rPr>
+              <a:t>Components of Tools</a:t>
+            </a:r>
+            <a:endParaRPr lang="en-US" sz="2400" dirty="0">
+              <a:solidFill>
+                <a:schemeClr val="accent6">
+                  <a:lumMod val="60000"/>
+                  <a:lumOff val="40000"/>
+                </a:schemeClr>
+              </a:solidFill>
+            </a:endParaRPr>
+          </a:p>
+        </p:txBody>
+      </p:sp>
+      <p:sp>
+        <p:nvSpPr>
+          <p:cNvPr id="4" name="Oval 3">
+            <a:extLst>
+              <a:ext uri="{FF2B5EF4-FFF2-40B4-BE49-F238E27FC236}">
+                <a16:creationId xmlns:a16="http://schemas.microsoft.com/office/drawing/2014/main" id="{4FBE8E86-25AA-E46C-C1BF-80483FDA9CA6}"/>
+              </a:ext>
+            </a:extLst>
+          </p:cNvPr>
+          <p:cNvSpPr/>
+          <p:nvPr/>
+        </p:nvSpPr>
+        <p:spPr>
+          <a:xfrm>
+            <a:off x="4921250" y="111443"/>
+            <a:ext cx="2051812" cy="928234"/>
+          </a:xfrm>
+          <a:prstGeom prst="ellipse">
+            <a:avLst/>
+          </a:prstGeom>
+          <a:solidFill>
+            <a:schemeClr val="accent2">
+              <a:lumMod val="75000"/>
+            </a:schemeClr>
+          </a:solidFill>
+        </p:spPr>
+        <p:style>
+          <a:lnRef idx="2">
+            <a:schemeClr val="accent1">
+              <a:shade val="15000"/>
+            </a:schemeClr>
+          </a:lnRef>
+          <a:fillRef idx="1">
+            <a:schemeClr val="accent1"/>
+          </a:fillRef>
+          <a:effectRef idx="0">
+            <a:schemeClr val="accent1"/>
+          </a:effectRef>
+          <a:fontRef idx="minor">
+            <a:schemeClr val="lt1"/>
+          </a:fontRef>
+        </p:style>
+        <p:txBody>
+          <a:bodyPr rtlCol="0" anchor="ctr"/>
+          <a:lstStyle/>
+          <a:p>
+            <a:pPr algn="ctr"/>
+            <a:r>
+              <a:rPr lang="en-US" sz="2800" dirty="0"/>
+              <a:t>Tools:</a:t>
+            </a:r>
+          </a:p>
+        </p:txBody>
+      </p:sp>
+      <p:sp>
+        <p:nvSpPr>
+          <p:cNvPr id="7" name="Oval 6">
+            <a:extLst>
+              <a:ext uri="{FF2B5EF4-FFF2-40B4-BE49-F238E27FC236}">
+                <a16:creationId xmlns:a16="http://schemas.microsoft.com/office/drawing/2014/main" id="{5517335F-7255-7356-62EB-DF73958BEC6D}"/>
+              </a:ext>
+            </a:extLst>
+          </p:cNvPr>
+          <p:cNvSpPr/>
+          <p:nvPr/>
+        </p:nvSpPr>
+        <p:spPr>
+          <a:xfrm>
+            <a:off x="1691640" y="1463040"/>
+            <a:ext cx="2212848" cy="1636776"/>
+          </a:xfrm>
+          <a:prstGeom prst="ellipse">
+            <a:avLst/>
+          </a:prstGeom>
+          <a:solidFill>
+            <a:schemeClr val="accent2">
+              <a:lumMod val="75000"/>
+            </a:schemeClr>
+          </a:solidFill>
+        </p:spPr>
+        <p:style>
+          <a:lnRef idx="2">
+            <a:schemeClr val="accent1">
+              <a:shade val="15000"/>
+            </a:schemeClr>
+          </a:lnRef>
+          <a:fillRef idx="1">
+            <a:schemeClr val="accent1"/>
+          </a:fillRef>
+          <a:effectRef idx="0">
+            <a:schemeClr val="accent1"/>
+          </a:effectRef>
+          <a:fontRef idx="minor">
+            <a:schemeClr val="lt1"/>
+          </a:fontRef>
+        </p:style>
+        <p:txBody>
+          <a:bodyPr rtlCol="0" anchor="ctr"/>
+          <a:lstStyle/>
+          <a:p>
+            <a:pPr algn="ctr"/>
+            <a:r>
+              <a:rPr lang="en-US" b="1" u="sng" dirty="0"/>
+              <a:t>Name</a:t>
+            </a:r>
+          </a:p>
+          <a:p>
+            <a:pPr algn="ctr"/>
+            <a:r>
+              <a:rPr lang="en-IN" dirty="0"/>
+              <a:t>Define what the tool does</a:t>
+            </a:r>
+            <a:endParaRPr lang="en-US" dirty="0"/>
+          </a:p>
+        </p:txBody>
+      </p:sp>
+      <p:sp>
+        <p:nvSpPr>
+          <p:cNvPr id="9" name="Oval 8">
+            <a:extLst>
+              <a:ext uri="{FF2B5EF4-FFF2-40B4-BE49-F238E27FC236}">
+                <a16:creationId xmlns:a16="http://schemas.microsoft.com/office/drawing/2014/main" id="{0A1E0969-8AD5-B18C-3287-EB474C7E7040}"/>
+              </a:ext>
+            </a:extLst>
+          </p:cNvPr>
+          <p:cNvSpPr/>
+          <p:nvPr/>
+        </p:nvSpPr>
+        <p:spPr>
+          <a:xfrm>
+            <a:off x="4194048" y="1633657"/>
+            <a:ext cx="3368040" cy="1536263"/>
+          </a:xfrm>
+          <a:prstGeom prst="ellipse">
+            <a:avLst/>
+          </a:prstGeom>
+          <a:solidFill>
+            <a:schemeClr val="accent2">
+              <a:lumMod val="75000"/>
+            </a:schemeClr>
+          </a:solidFill>
+        </p:spPr>
+        <p:style>
+          <a:lnRef idx="2">
+            <a:schemeClr val="accent1">
+              <a:shade val="15000"/>
+            </a:schemeClr>
+          </a:lnRef>
+          <a:fillRef idx="1">
+            <a:schemeClr val="accent1"/>
+          </a:fillRef>
+          <a:effectRef idx="0">
+            <a:schemeClr val="accent1"/>
+          </a:effectRef>
+          <a:fontRef idx="minor">
+            <a:schemeClr val="lt1"/>
+          </a:fontRef>
+        </p:style>
+        <p:txBody>
+          <a:bodyPr rtlCol="0" anchor="ctr"/>
+          <a:lstStyle/>
+          <a:p>
+            <a:pPr algn="ctr"/>
+            <a:r>
+              <a:rPr lang="en-IN" b="1" u="sng" dirty="0"/>
+              <a:t>Function description</a:t>
+            </a:r>
+            <a:r>
+              <a:rPr lang="en-IN" u="sng" dirty="0"/>
+              <a:t>:</a:t>
+            </a:r>
+            <a:r>
+              <a:rPr lang="en-IN" dirty="0"/>
+              <a:t> Describe what it needs as input</a:t>
+            </a:r>
+            <a:endParaRPr lang="en-US" dirty="0"/>
+          </a:p>
+        </p:txBody>
+      </p:sp>
+      <p:sp>
+        <p:nvSpPr>
+          <p:cNvPr id="11" name="Oval 10">
+            <a:extLst>
+              <a:ext uri="{FF2B5EF4-FFF2-40B4-BE49-F238E27FC236}">
+                <a16:creationId xmlns:a16="http://schemas.microsoft.com/office/drawing/2014/main" id="{4CACC4D5-FF39-ECB9-956F-FD1B31938578}"/>
+              </a:ext>
+            </a:extLst>
+          </p:cNvPr>
+          <p:cNvSpPr/>
+          <p:nvPr/>
+        </p:nvSpPr>
+        <p:spPr>
+          <a:xfrm>
+            <a:off x="7985760" y="1719072"/>
+            <a:ext cx="3368040" cy="1520952"/>
+          </a:xfrm>
+          <a:prstGeom prst="ellipse">
+            <a:avLst/>
+          </a:prstGeom>
+          <a:solidFill>
+            <a:schemeClr val="accent2">
+              <a:lumMod val="75000"/>
+            </a:schemeClr>
+          </a:solidFill>
+        </p:spPr>
+        <p:style>
+          <a:lnRef idx="2">
+            <a:schemeClr val="accent1">
+              <a:shade val="15000"/>
+            </a:schemeClr>
+          </a:lnRef>
+          <a:fillRef idx="1">
+            <a:schemeClr val="accent1"/>
+          </a:fillRef>
+          <a:effectRef idx="0">
+            <a:schemeClr val="accent1"/>
+          </a:effectRef>
+          <a:fontRef idx="minor">
+            <a:schemeClr val="lt1"/>
+          </a:fontRef>
+        </p:style>
+        <p:txBody>
+          <a:bodyPr rtlCol="0" anchor="ctr"/>
+          <a:lstStyle/>
+          <a:p>
+            <a:pPr algn="ctr"/>
+            <a:r>
+              <a:rPr lang="en-IN" b="1" u="sng" dirty="0"/>
+              <a:t>Input and output field</a:t>
+            </a:r>
+            <a:r>
+              <a:rPr lang="en-IN" u="sng" dirty="0"/>
+              <a:t>: </a:t>
+            </a:r>
+            <a:r>
+              <a:rPr lang="en-IN" dirty="0"/>
+              <a:t>Specify the expected input format and the output type</a:t>
+            </a:r>
+            <a:endParaRPr lang="en-US" dirty="0"/>
+          </a:p>
+        </p:txBody>
+      </p:sp>
+      <p:pic>
+        <p:nvPicPr>
+          <p:cNvPr id="14" name="Picture 13">
+            <a:extLst>
+              <a:ext uri="{FF2B5EF4-FFF2-40B4-BE49-F238E27FC236}">
+                <a16:creationId xmlns:a16="http://schemas.microsoft.com/office/drawing/2014/main" id="{73B9E361-AB7A-433A-AB58-7407166D08EF}"/>
+              </a:ext>
+            </a:extLst>
+          </p:cNvPr>
+          <p:cNvPicPr>
+            <a:picLocks noChangeAspect="1"/>
+          </p:cNvPicPr>
+          <p:nvPr/>
+        </p:nvPicPr>
+        <p:blipFill>
+          <a:blip r:embed="rId2"/>
+          <a:stretch>
+            <a:fillRect/>
+          </a:stretch>
+        </p:blipFill>
+        <p:spPr>
+          <a:xfrm>
+            <a:off x="1217386" y="3250119"/>
+            <a:ext cx="8786439" cy="3496438"/>
+          </a:xfrm>
+          <a:prstGeom prst="rect">
+            <a:avLst/>
+          </a:prstGeom>
+        </p:spPr>
+      </p:pic>
+    </p:spTree>
+    <p:extLst>
+      <p:ext uri="{BB962C8B-B14F-4D97-AF65-F5344CB8AC3E}">
+        <p14:creationId xmlns:p14="http://schemas.microsoft.com/office/powerpoint/2010/main" val="3984812055"/>
+      </p:ext>
+    </p:extLst>
+  </p:cSld>
+  <p:clrMapOvr>
+    <a:masterClrMapping/>
+  </p:clrMapOvr>
+</p:sld>
+</file>
+
+<file path=ppt/slides/slide7.xml><?xml version="1.0" encoding="utf-8"?>
 <p:sld xmlns:a="http://schemas.openxmlformats.org/drawingml/2006/main" xmlns:r="http://schemas.openxmlformats.org/officeDocument/2006/relationships" xmlns:p="http://schemas.openxmlformats.org/presentationml/2006/main">
   <p:cSld>
     <p:spTree>
@@ -17350,7 +18743,7 @@
 </p:sld>
 </file>
 
-<file path=ppt/slides/slide7.xml><?xml version="1.0" encoding="utf-8"?>
+<file path=ppt/slides/slide8.xml><?xml version="1.0" encoding="utf-8"?>
 <p:sld xmlns:a="http://schemas.openxmlformats.org/drawingml/2006/main" xmlns:r="http://schemas.openxmlformats.org/officeDocument/2006/relationships" xmlns:p="http://schemas.openxmlformats.org/presentationml/2006/main">
   <p:cSld>
     <p:spTree>
@@ -18785,7 +20178,7 @@
 </p:sld>
 </file>
 
-<file path=ppt/slides/slide8.xml><?xml version="1.0" encoding="utf-8"?>
+<file path=ppt/slides/slide9.xml><?xml version="1.0" encoding="utf-8"?>
 <p:sld xmlns:a="http://schemas.openxmlformats.org/drawingml/2006/main" xmlns:r="http://schemas.openxmlformats.org/officeDocument/2006/relationships" xmlns:p="http://schemas.openxmlformats.org/presentationml/2006/main">
   <p:cSld>
     <p:spTree>
@@ -19263,1018 +20656,6 @@
     <p:extLst>
       <p:ext uri="{BB962C8B-B14F-4D97-AF65-F5344CB8AC3E}">
         <p14:creationId xmlns:p14="http://schemas.microsoft.com/office/powerpoint/2010/main" val="2944212593"/>
-      </p:ext>
-    </p:extLst>
-  </p:cSld>
-  <p:clrMapOvr>
-    <a:masterClrMapping/>
-  </p:clrMapOvr>
-</p:sld>
-</file>
-
-<file path=ppt/slides/slide9.xml><?xml version="1.0" encoding="utf-8"?>
-<p:sld xmlns:a="http://schemas.openxmlformats.org/drawingml/2006/main" xmlns:r="http://schemas.openxmlformats.org/officeDocument/2006/relationships" xmlns:p="http://schemas.openxmlformats.org/presentationml/2006/main">
-  <p:cSld>
-    <p:spTree>
-      <p:nvGrpSpPr>
-        <p:cNvPr id="1" name="">
-          <a:extLst>
-            <a:ext uri="{FF2B5EF4-FFF2-40B4-BE49-F238E27FC236}">
-              <a16:creationId xmlns:a16="http://schemas.microsoft.com/office/drawing/2014/main" id="{A3E345BD-A314-25EB-4F25-15B85A40F224}"/>
-            </a:ext>
-          </a:extLst>
-        </p:cNvPr>
-        <p:cNvGrpSpPr/>
-        <p:nvPr/>
-      </p:nvGrpSpPr>
-      <p:grpSpPr>
-        <a:xfrm>
-          <a:off x="0" y="0"/>
-          <a:ext cx="0" cy="0"/>
-          <a:chOff x="0" y="0"/>
-          <a:chExt cx="0" cy="0"/>
-        </a:xfrm>
-      </p:grpSpPr>
-      <p:sp>
-        <p:nvSpPr>
-          <p:cNvPr id="6" name="TextBox 5">
-            <a:extLst>
-              <a:ext uri="{FF2B5EF4-FFF2-40B4-BE49-F238E27FC236}">
-                <a16:creationId xmlns:a16="http://schemas.microsoft.com/office/drawing/2014/main" id="{C7001DC3-177A-561F-5B88-77181103CB1F}"/>
-              </a:ext>
-            </a:extLst>
-          </p:cNvPr>
-          <p:cNvSpPr txBox="1"/>
-          <p:nvPr/>
-        </p:nvSpPr>
-        <p:spPr>
-          <a:xfrm>
-            <a:off x="56704" y="504456"/>
-            <a:ext cx="11393424" cy="461665"/>
-          </a:xfrm>
-          <a:prstGeom prst="rect">
-            <a:avLst/>
-          </a:prstGeom>
-          <a:noFill/>
-        </p:spPr>
-        <p:txBody>
-          <a:bodyPr wrap="square">
-            <a:spAutoFit/>
-          </a:bodyPr>
-          <a:lstStyle/>
-          <a:p>
-            <a:pPr marL="0" indent="0">
-              <a:buNone/>
-            </a:pPr>
-            <a:r>
-              <a:rPr lang="en-US" sz="2400" b="1" dirty="0">
-                <a:solidFill>
-                  <a:schemeClr val="accent6">
-                    <a:lumMod val="60000"/>
-                    <a:lumOff val="40000"/>
-                  </a:schemeClr>
-                </a:solidFill>
-              </a:rPr>
-              <a:t>Agents can collaborate/communicate with other agents</a:t>
-            </a:r>
-            <a:r>
-              <a:rPr lang="en-US" sz="2400" dirty="0">
-                <a:solidFill>
-                  <a:schemeClr val="accent6">
-                    <a:lumMod val="60000"/>
-                    <a:lumOff val="40000"/>
-                  </a:schemeClr>
-                </a:solidFill>
-              </a:rPr>
-              <a:t> to achieve the goal.</a:t>
-            </a:r>
-          </a:p>
-        </p:txBody>
-      </p:sp>
-      <p:sp>
-        <p:nvSpPr>
-          <p:cNvPr id="3" name="Rectangle 2">
-            <a:extLst>
-              <a:ext uri="{FF2B5EF4-FFF2-40B4-BE49-F238E27FC236}">
-                <a16:creationId xmlns:a16="http://schemas.microsoft.com/office/drawing/2014/main" id="{C1A4F328-092F-A822-CF23-F3E67BA2B3A0}"/>
-              </a:ext>
-            </a:extLst>
-          </p:cNvPr>
-          <p:cNvSpPr/>
-          <p:nvPr/>
-        </p:nvSpPr>
-        <p:spPr>
-          <a:xfrm>
-            <a:off x="1132016" y="1783080"/>
-            <a:ext cx="1883664" cy="886968"/>
-          </a:xfrm>
-          <a:prstGeom prst="rect">
-            <a:avLst/>
-          </a:prstGeom>
-        </p:spPr>
-        <p:style>
-          <a:lnRef idx="2">
-            <a:schemeClr val="accent1">
-              <a:shade val="15000"/>
-            </a:schemeClr>
-          </a:lnRef>
-          <a:fillRef idx="1">
-            <a:schemeClr val="accent1"/>
-          </a:fillRef>
-          <a:effectRef idx="0">
-            <a:schemeClr val="accent1"/>
-          </a:effectRef>
-          <a:fontRef idx="minor">
-            <a:schemeClr val="lt1"/>
-          </a:fontRef>
-        </p:style>
-        <p:txBody>
-          <a:bodyPr rtlCol="0" anchor="ctr"/>
-          <a:lstStyle/>
-          <a:p>
-            <a:pPr algn="ctr"/>
-            <a:r>
-              <a:rPr lang="en-US" dirty="0"/>
-              <a:t>Agent1</a:t>
-            </a:r>
-          </a:p>
-        </p:txBody>
-      </p:sp>
-      <p:sp>
-        <p:nvSpPr>
-          <p:cNvPr id="5" name="Rectangle 4">
-            <a:extLst>
-              <a:ext uri="{FF2B5EF4-FFF2-40B4-BE49-F238E27FC236}">
-                <a16:creationId xmlns:a16="http://schemas.microsoft.com/office/drawing/2014/main" id="{D4C5D271-524D-D60D-5E1C-1405AB5802D3}"/>
-              </a:ext>
-            </a:extLst>
-          </p:cNvPr>
-          <p:cNvSpPr/>
-          <p:nvPr/>
-        </p:nvSpPr>
-        <p:spPr>
-          <a:xfrm>
-            <a:off x="3786316" y="1783080"/>
-            <a:ext cx="1883664" cy="886968"/>
-          </a:xfrm>
-          <a:prstGeom prst="rect">
-            <a:avLst/>
-          </a:prstGeom>
-        </p:spPr>
-        <p:style>
-          <a:lnRef idx="2">
-            <a:schemeClr val="accent1">
-              <a:shade val="15000"/>
-            </a:schemeClr>
-          </a:lnRef>
-          <a:fillRef idx="1">
-            <a:schemeClr val="accent1"/>
-          </a:fillRef>
-          <a:effectRef idx="0">
-            <a:schemeClr val="accent1"/>
-          </a:effectRef>
-          <a:fontRef idx="minor">
-            <a:schemeClr val="lt1"/>
-          </a:fontRef>
-        </p:style>
-        <p:txBody>
-          <a:bodyPr rtlCol="0" anchor="ctr"/>
-          <a:lstStyle/>
-          <a:p>
-            <a:pPr algn="ctr"/>
-            <a:r>
-              <a:rPr lang="en-US" dirty="0"/>
-              <a:t>Agent2</a:t>
-            </a:r>
-          </a:p>
-        </p:txBody>
-      </p:sp>
-      <p:sp>
-        <p:nvSpPr>
-          <p:cNvPr id="8" name="Rectangle 7">
-            <a:extLst>
-              <a:ext uri="{FF2B5EF4-FFF2-40B4-BE49-F238E27FC236}">
-                <a16:creationId xmlns:a16="http://schemas.microsoft.com/office/drawing/2014/main" id="{1676AF9A-722E-F57C-B256-22DFD8318DD0}"/>
-              </a:ext>
-            </a:extLst>
-          </p:cNvPr>
-          <p:cNvSpPr/>
-          <p:nvPr/>
-        </p:nvSpPr>
-        <p:spPr>
-          <a:xfrm>
-            <a:off x="6440616" y="1783080"/>
-            <a:ext cx="1883664" cy="886968"/>
-          </a:xfrm>
-          <a:prstGeom prst="rect">
-            <a:avLst/>
-          </a:prstGeom>
-        </p:spPr>
-        <p:style>
-          <a:lnRef idx="2">
-            <a:schemeClr val="accent1">
-              <a:shade val="15000"/>
-            </a:schemeClr>
-          </a:lnRef>
-          <a:fillRef idx="1">
-            <a:schemeClr val="accent1"/>
-          </a:fillRef>
-          <a:effectRef idx="0">
-            <a:schemeClr val="accent1"/>
-          </a:effectRef>
-          <a:fontRef idx="minor">
-            <a:schemeClr val="lt1"/>
-          </a:fontRef>
-        </p:style>
-        <p:txBody>
-          <a:bodyPr rtlCol="0" anchor="ctr"/>
-          <a:lstStyle/>
-          <a:p>
-            <a:pPr algn="ctr"/>
-            <a:r>
-              <a:rPr lang="en-US" dirty="0"/>
-              <a:t>Agent3</a:t>
-            </a:r>
-          </a:p>
-        </p:txBody>
-      </p:sp>
-      <p:sp>
-        <p:nvSpPr>
-          <p:cNvPr id="14" name="Rectangle 13">
-            <a:extLst>
-              <a:ext uri="{FF2B5EF4-FFF2-40B4-BE49-F238E27FC236}">
-                <a16:creationId xmlns:a16="http://schemas.microsoft.com/office/drawing/2014/main" id="{C2E5BA72-475F-AFE0-8515-6870570888BE}"/>
-              </a:ext>
-            </a:extLst>
-          </p:cNvPr>
-          <p:cNvSpPr/>
-          <p:nvPr/>
-        </p:nvSpPr>
-        <p:spPr>
-          <a:xfrm>
-            <a:off x="8906448" y="1783080"/>
-            <a:ext cx="1883664" cy="886968"/>
-          </a:xfrm>
-          <a:prstGeom prst="rect">
-            <a:avLst/>
-          </a:prstGeom>
-        </p:spPr>
-        <p:style>
-          <a:lnRef idx="2">
-            <a:schemeClr val="accent1">
-              <a:shade val="15000"/>
-            </a:schemeClr>
-          </a:lnRef>
-          <a:fillRef idx="1">
-            <a:schemeClr val="accent1"/>
-          </a:fillRef>
-          <a:effectRef idx="0">
-            <a:schemeClr val="accent1"/>
-          </a:effectRef>
-          <a:fontRef idx="minor">
-            <a:schemeClr val="lt1"/>
-          </a:fontRef>
-        </p:style>
-        <p:txBody>
-          <a:bodyPr rtlCol="0" anchor="ctr"/>
-          <a:lstStyle/>
-          <a:p>
-            <a:pPr algn="ctr"/>
-            <a:r>
-              <a:rPr lang="en-US" dirty="0"/>
-              <a:t>Agent4</a:t>
-            </a:r>
-          </a:p>
-        </p:txBody>
-      </p:sp>
-      <mc:AlternateContent xmlns:mc="http://schemas.openxmlformats.org/markup-compatibility/2006" xmlns:p14="http://schemas.microsoft.com/office/powerpoint/2010/main">
-        <mc:Choice Requires="p14">
-          <p:contentPart p14:bwMode="auto" r:id="rId2">
-            <p14:nvContentPartPr>
-              <p14:cNvPr id="17" name="Ink 16">
-                <a:extLst>
-                  <a:ext uri="{FF2B5EF4-FFF2-40B4-BE49-F238E27FC236}">
-                    <a16:creationId xmlns:a16="http://schemas.microsoft.com/office/drawing/2014/main" id="{6B94E43C-F160-C7CB-2E6D-3A3F7BC7C1F8}"/>
-                  </a:ext>
-                </a:extLst>
-              </p14:cNvPr>
-              <p14:cNvContentPartPr/>
-              <p14:nvPr/>
-            </p14:nvContentPartPr>
-            <p14:xfrm>
-              <a:off x="3200000" y="2154240"/>
-              <a:ext cx="517680" cy="128160"/>
-            </p14:xfrm>
-          </p:contentPart>
-        </mc:Choice>
-        <mc:Fallback xmlns="">
-          <p:pic>
-            <p:nvPicPr>
-              <p:cNvPr id="17" name="Ink 16">
-                <a:extLst>
-                  <a:ext uri="{FF2B5EF4-FFF2-40B4-BE49-F238E27FC236}">
-                    <a16:creationId xmlns:a16="http://schemas.microsoft.com/office/drawing/2014/main" id="{6B94E43C-F160-C7CB-2E6D-3A3F7BC7C1F8}"/>
-                  </a:ext>
-                </a:extLst>
-              </p:cNvPr>
-              <p:cNvPicPr/>
-              <p:nvPr/>
-            </p:nvPicPr>
-            <p:blipFill>
-              <a:blip r:embed="rId3"/>
-              <a:stretch>
-                <a:fillRect/>
-              </a:stretch>
-            </p:blipFill>
-            <p:spPr>
-              <a:xfrm>
-                <a:off x="3182000" y="2136240"/>
-                <a:ext cx="553320" cy="163800"/>
-              </a:xfrm>
-              <a:prstGeom prst="rect">
-                <a:avLst/>
-              </a:prstGeom>
-            </p:spPr>
-          </p:pic>
-        </mc:Fallback>
-      </mc:AlternateContent>
-      <p:grpSp>
-        <p:nvGrpSpPr>
-          <p:cNvPr id="23" name="Group 22">
-            <a:extLst>
-              <a:ext uri="{FF2B5EF4-FFF2-40B4-BE49-F238E27FC236}">
-                <a16:creationId xmlns:a16="http://schemas.microsoft.com/office/drawing/2014/main" id="{8C048A94-00E8-D703-AFE0-1DB9A4BBC774}"/>
-              </a:ext>
-            </a:extLst>
-          </p:cNvPr>
-          <p:cNvGrpSpPr/>
-          <p:nvPr/>
-        </p:nvGrpSpPr>
-        <p:grpSpPr>
-          <a:xfrm>
-            <a:off x="5855000" y="2158920"/>
-            <a:ext cx="444960" cy="172080"/>
-            <a:chOff x="5911704" y="4115736"/>
-            <a:chExt cx="444960" cy="172080"/>
-          </a:xfrm>
-        </p:grpSpPr>
-        <mc:AlternateContent xmlns:mc="http://schemas.openxmlformats.org/markup-compatibility/2006" xmlns:p14="http://schemas.microsoft.com/office/powerpoint/2010/main">
-          <mc:Choice Requires="p14">
-            <p:contentPart p14:bwMode="auto" r:id="rId4">
-              <p14:nvContentPartPr>
-                <p14:cNvPr id="18" name="Ink 17">
-                  <a:extLst>
-                    <a:ext uri="{FF2B5EF4-FFF2-40B4-BE49-F238E27FC236}">
-                      <a16:creationId xmlns:a16="http://schemas.microsoft.com/office/drawing/2014/main" id="{C93A8075-FE64-1AEF-A828-8CC83E583651}"/>
-                    </a:ext>
-                  </a:extLst>
-                </p14:cNvPr>
-                <p14:cNvContentPartPr/>
-                <p14:nvPr/>
-              </p14:nvContentPartPr>
-              <p14:xfrm>
-                <a:off x="5911704" y="4169016"/>
-                <a:ext cx="315000" cy="26640"/>
-              </p14:xfrm>
-            </p:contentPart>
-          </mc:Choice>
-          <mc:Fallback xmlns="">
-            <p:pic>
-              <p:nvPicPr>
-                <p:cNvPr id="18" name="Ink 17">
-                  <a:extLst>
-                    <a:ext uri="{FF2B5EF4-FFF2-40B4-BE49-F238E27FC236}">
-                      <a16:creationId xmlns:a16="http://schemas.microsoft.com/office/drawing/2014/main" id="{C93A8075-FE64-1AEF-A828-8CC83E583651}"/>
-                    </a:ext>
-                  </a:extLst>
-                </p:cNvPr>
-                <p:cNvPicPr/>
-                <p:nvPr/>
-              </p:nvPicPr>
-              <p:blipFill>
-                <a:blip r:embed="rId5"/>
-                <a:stretch>
-                  <a:fillRect/>
-                </a:stretch>
-              </p:blipFill>
-              <p:spPr>
-                <a:xfrm>
-                  <a:off x="5894064" y="4151016"/>
-                  <a:ext cx="350640" cy="62280"/>
-                </a:xfrm>
-                <a:prstGeom prst="rect">
-                  <a:avLst/>
-                </a:prstGeom>
-              </p:spPr>
-            </p:pic>
-          </mc:Fallback>
-        </mc:AlternateContent>
-        <mc:AlternateContent xmlns:mc="http://schemas.openxmlformats.org/markup-compatibility/2006" xmlns:p14="http://schemas.microsoft.com/office/powerpoint/2010/main">
-          <mc:Choice Requires="p14">
-            <p:contentPart p14:bwMode="auto" r:id="rId6">
-              <p14:nvContentPartPr>
-                <p14:cNvPr id="19" name="Ink 18">
-                  <a:extLst>
-                    <a:ext uri="{FF2B5EF4-FFF2-40B4-BE49-F238E27FC236}">
-                      <a16:creationId xmlns:a16="http://schemas.microsoft.com/office/drawing/2014/main" id="{544EDA8B-D4A4-EAA1-43D5-20272F395262}"/>
-                    </a:ext>
-                  </a:extLst>
-                </p14:cNvPr>
-                <p14:cNvContentPartPr/>
-                <p14:nvPr/>
-              </p14:nvContentPartPr>
-              <p14:xfrm>
-                <a:off x="6164424" y="4115736"/>
-                <a:ext cx="192240" cy="172080"/>
-              </p14:xfrm>
-            </p:contentPart>
-          </mc:Choice>
-          <mc:Fallback xmlns="">
-            <p:pic>
-              <p:nvPicPr>
-                <p:cNvPr id="19" name="Ink 18">
-                  <a:extLst>
-                    <a:ext uri="{FF2B5EF4-FFF2-40B4-BE49-F238E27FC236}">
-                      <a16:creationId xmlns:a16="http://schemas.microsoft.com/office/drawing/2014/main" id="{544EDA8B-D4A4-EAA1-43D5-20272F395262}"/>
-                    </a:ext>
-                  </a:extLst>
-                </p:cNvPr>
-                <p:cNvPicPr/>
-                <p:nvPr/>
-              </p:nvPicPr>
-              <p:blipFill>
-                <a:blip r:embed="rId7"/>
-                <a:stretch>
-                  <a:fillRect/>
-                </a:stretch>
-              </p:blipFill>
-              <p:spPr>
-                <a:xfrm>
-                  <a:off x="6146424" y="4097736"/>
-                  <a:ext cx="227880" cy="207720"/>
-                </a:xfrm>
-                <a:prstGeom prst="rect">
-                  <a:avLst/>
-                </a:prstGeom>
-              </p:spPr>
-            </p:pic>
-          </mc:Fallback>
-        </mc:AlternateContent>
-      </p:grpSp>
-      <p:grpSp>
-        <p:nvGrpSpPr>
-          <p:cNvPr id="22" name="Group 21">
-            <a:extLst>
-              <a:ext uri="{FF2B5EF4-FFF2-40B4-BE49-F238E27FC236}">
-                <a16:creationId xmlns:a16="http://schemas.microsoft.com/office/drawing/2014/main" id="{C57D43DD-3FD2-E350-D253-7E00D93B9D22}"/>
-              </a:ext>
-            </a:extLst>
-          </p:cNvPr>
-          <p:cNvGrpSpPr/>
-          <p:nvPr/>
-        </p:nvGrpSpPr>
-        <p:grpSpPr>
-          <a:xfrm>
-            <a:off x="8468240" y="2159280"/>
-            <a:ext cx="441000" cy="164160"/>
-            <a:chOff x="8524944" y="4116096"/>
-            <a:chExt cx="441000" cy="164160"/>
-          </a:xfrm>
-        </p:grpSpPr>
-        <mc:AlternateContent xmlns:mc="http://schemas.openxmlformats.org/markup-compatibility/2006" xmlns:p14="http://schemas.microsoft.com/office/powerpoint/2010/main">
-          <mc:Choice Requires="p14">
-            <p:contentPart p14:bwMode="auto" r:id="rId8">
-              <p14:nvContentPartPr>
-                <p14:cNvPr id="20" name="Ink 19">
-                  <a:extLst>
-                    <a:ext uri="{FF2B5EF4-FFF2-40B4-BE49-F238E27FC236}">
-                      <a16:creationId xmlns:a16="http://schemas.microsoft.com/office/drawing/2014/main" id="{9FCC5093-44EF-8ECA-D365-D8526837CC2A}"/>
-                    </a:ext>
-                  </a:extLst>
-                </p14:cNvPr>
-                <p14:cNvContentPartPr/>
-                <p14:nvPr/>
-              </p14:nvContentPartPr>
-              <p14:xfrm>
-                <a:off x="8524944" y="4182336"/>
-                <a:ext cx="351720" cy="19080"/>
-              </p14:xfrm>
-            </p:contentPart>
-          </mc:Choice>
-          <mc:Fallback xmlns="">
-            <p:pic>
-              <p:nvPicPr>
-                <p:cNvPr id="20" name="Ink 19">
-                  <a:extLst>
-                    <a:ext uri="{FF2B5EF4-FFF2-40B4-BE49-F238E27FC236}">
-                      <a16:creationId xmlns:a16="http://schemas.microsoft.com/office/drawing/2014/main" id="{9FCC5093-44EF-8ECA-D365-D8526837CC2A}"/>
-                    </a:ext>
-                  </a:extLst>
-                </p:cNvPr>
-                <p:cNvPicPr/>
-                <p:nvPr/>
-              </p:nvPicPr>
-              <p:blipFill>
-                <a:blip r:embed="rId9"/>
-                <a:stretch>
-                  <a:fillRect/>
-                </a:stretch>
-              </p:blipFill>
-              <p:spPr>
-                <a:xfrm>
-                  <a:off x="8507304" y="4164336"/>
-                  <a:ext cx="387360" cy="54720"/>
-                </a:xfrm>
-                <a:prstGeom prst="rect">
-                  <a:avLst/>
-                </a:prstGeom>
-              </p:spPr>
-            </p:pic>
-          </mc:Fallback>
-        </mc:AlternateContent>
-        <mc:AlternateContent xmlns:mc="http://schemas.openxmlformats.org/markup-compatibility/2006" xmlns:p14="http://schemas.microsoft.com/office/powerpoint/2010/main">
-          <mc:Choice Requires="p14">
-            <p:contentPart p14:bwMode="auto" r:id="rId10">
-              <p14:nvContentPartPr>
-                <p14:cNvPr id="21" name="Ink 20">
-                  <a:extLst>
-                    <a:ext uri="{FF2B5EF4-FFF2-40B4-BE49-F238E27FC236}">
-                      <a16:creationId xmlns:a16="http://schemas.microsoft.com/office/drawing/2014/main" id="{14DB4CC4-7AF4-6A31-00FB-06AA20F02CA8}"/>
-                    </a:ext>
-                  </a:extLst>
-                </p14:cNvPr>
-                <p14:cNvContentPartPr/>
-                <p14:nvPr/>
-              </p14:nvContentPartPr>
-              <p14:xfrm>
-                <a:off x="8698824" y="4116096"/>
-                <a:ext cx="267120" cy="164160"/>
-              </p14:xfrm>
-            </p:contentPart>
-          </mc:Choice>
-          <mc:Fallback xmlns="">
-            <p:pic>
-              <p:nvPicPr>
-                <p:cNvPr id="21" name="Ink 20">
-                  <a:extLst>
-                    <a:ext uri="{FF2B5EF4-FFF2-40B4-BE49-F238E27FC236}">
-                      <a16:creationId xmlns:a16="http://schemas.microsoft.com/office/drawing/2014/main" id="{14DB4CC4-7AF4-6A31-00FB-06AA20F02CA8}"/>
-                    </a:ext>
-                  </a:extLst>
-                </p:cNvPr>
-                <p:cNvPicPr/>
-                <p:nvPr/>
-              </p:nvPicPr>
-              <p:blipFill>
-                <a:blip r:embed="rId11"/>
-                <a:stretch>
-                  <a:fillRect/>
-                </a:stretch>
-              </p:blipFill>
-              <p:spPr>
-                <a:xfrm>
-                  <a:off x="8680824" y="4098456"/>
-                  <a:ext cx="302760" cy="199800"/>
-                </a:xfrm>
-                <a:prstGeom prst="rect">
-                  <a:avLst/>
-                </a:prstGeom>
-              </p:spPr>
-            </p:pic>
-          </mc:Fallback>
-        </mc:AlternateContent>
-      </p:grpSp>
-      <p:grpSp>
-        <p:nvGrpSpPr>
-          <p:cNvPr id="26" name="Group 25">
-            <a:extLst>
-              <a:ext uri="{FF2B5EF4-FFF2-40B4-BE49-F238E27FC236}">
-                <a16:creationId xmlns:a16="http://schemas.microsoft.com/office/drawing/2014/main" id="{7B932CAA-E337-825D-758C-2BFC44A3527E}"/>
-              </a:ext>
-            </a:extLst>
-          </p:cNvPr>
-          <p:cNvGrpSpPr/>
-          <p:nvPr/>
-        </p:nvGrpSpPr>
-        <p:grpSpPr>
-          <a:xfrm>
-            <a:off x="5002520" y="1105560"/>
-            <a:ext cx="3946320" cy="667800"/>
-            <a:chOff x="5059224" y="3062376"/>
-            <a:chExt cx="3946320" cy="667800"/>
-          </a:xfrm>
-        </p:grpSpPr>
-        <mc:AlternateContent xmlns:mc="http://schemas.openxmlformats.org/markup-compatibility/2006" xmlns:p14="http://schemas.microsoft.com/office/powerpoint/2010/main">
-          <mc:Choice Requires="p14">
-            <p:contentPart p14:bwMode="auto" r:id="rId12">
-              <p14:nvContentPartPr>
-                <p14:cNvPr id="24" name="Ink 23">
-                  <a:extLst>
-                    <a:ext uri="{FF2B5EF4-FFF2-40B4-BE49-F238E27FC236}">
-                      <a16:creationId xmlns:a16="http://schemas.microsoft.com/office/drawing/2014/main" id="{B258CF55-E5AB-F082-6573-18CC5FB28EFC}"/>
-                    </a:ext>
-                  </a:extLst>
-                </p14:cNvPr>
-                <p14:cNvContentPartPr/>
-                <p14:nvPr/>
-              </p14:nvContentPartPr>
-              <p14:xfrm>
-                <a:off x="5059224" y="3062376"/>
-                <a:ext cx="3918240" cy="667800"/>
-              </p14:xfrm>
-            </p:contentPart>
-          </mc:Choice>
-          <mc:Fallback xmlns="">
-            <p:pic>
-              <p:nvPicPr>
-                <p:cNvPr id="24" name="Ink 23">
-                  <a:extLst>
-                    <a:ext uri="{FF2B5EF4-FFF2-40B4-BE49-F238E27FC236}">
-                      <a16:creationId xmlns:a16="http://schemas.microsoft.com/office/drawing/2014/main" id="{B258CF55-E5AB-F082-6573-18CC5FB28EFC}"/>
-                    </a:ext>
-                  </a:extLst>
-                </p:cNvPr>
-                <p:cNvPicPr/>
-                <p:nvPr/>
-              </p:nvPicPr>
-              <p:blipFill>
-                <a:blip r:embed="rId13"/>
-                <a:stretch>
-                  <a:fillRect/>
-                </a:stretch>
-              </p:blipFill>
-              <p:spPr>
-                <a:xfrm>
-                  <a:off x="5041584" y="3044376"/>
-                  <a:ext cx="3953880" cy="703440"/>
-                </a:xfrm>
-                <a:prstGeom prst="rect">
-                  <a:avLst/>
-                </a:prstGeom>
-              </p:spPr>
-            </p:pic>
-          </mc:Fallback>
-        </mc:AlternateContent>
-        <mc:AlternateContent xmlns:mc="http://schemas.openxmlformats.org/markup-compatibility/2006" xmlns:p14="http://schemas.microsoft.com/office/powerpoint/2010/main">
-          <mc:Choice Requires="p14">
-            <p:contentPart p14:bwMode="auto" r:id="rId14">
-              <p14:nvContentPartPr>
-                <p14:cNvPr id="25" name="Ink 24">
-                  <a:extLst>
-                    <a:ext uri="{FF2B5EF4-FFF2-40B4-BE49-F238E27FC236}">
-                      <a16:creationId xmlns:a16="http://schemas.microsoft.com/office/drawing/2014/main" id="{7793DCE5-CC3C-4CB2-150A-00A5AE7353C3}"/>
-                    </a:ext>
-                  </a:extLst>
-                </p14:cNvPr>
-                <p14:cNvContentPartPr/>
-                <p14:nvPr/>
-              </p14:nvContentPartPr>
-              <p14:xfrm>
-                <a:off x="8775504" y="3388896"/>
-                <a:ext cx="230040" cy="167040"/>
-              </p14:xfrm>
-            </p:contentPart>
-          </mc:Choice>
-          <mc:Fallback xmlns="">
-            <p:pic>
-              <p:nvPicPr>
-                <p:cNvPr id="25" name="Ink 24">
-                  <a:extLst>
-                    <a:ext uri="{FF2B5EF4-FFF2-40B4-BE49-F238E27FC236}">
-                      <a16:creationId xmlns:a16="http://schemas.microsoft.com/office/drawing/2014/main" id="{7793DCE5-CC3C-4CB2-150A-00A5AE7353C3}"/>
-                    </a:ext>
-                  </a:extLst>
-                </p:cNvPr>
-                <p:cNvPicPr/>
-                <p:nvPr/>
-              </p:nvPicPr>
-              <p:blipFill>
-                <a:blip r:embed="rId15"/>
-                <a:stretch>
-                  <a:fillRect/>
-                </a:stretch>
-              </p:blipFill>
-              <p:spPr>
-                <a:xfrm>
-                  <a:off x="8757504" y="3371256"/>
-                  <a:ext cx="265680" cy="202680"/>
-                </a:xfrm>
-                <a:prstGeom prst="rect">
-                  <a:avLst/>
-                </a:prstGeom>
-              </p:spPr>
-            </p:pic>
-          </mc:Fallback>
-        </mc:AlternateContent>
-      </p:grpSp>
-      <p:sp>
-        <p:nvSpPr>
-          <p:cNvPr id="29" name="Oval 28">
-            <a:extLst>
-              <a:ext uri="{FF2B5EF4-FFF2-40B4-BE49-F238E27FC236}">
-                <a16:creationId xmlns:a16="http://schemas.microsoft.com/office/drawing/2014/main" id="{B5E8DE72-4FA6-75EE-EF69-BCDF5E0168EA}"/>
-              </a:ext>
-            </a:extLst>
-          </p:cNvPr>
-          <p:cNvSpPr/>
-          <p:nvPr/>
-        </p:nvSpPr>
-        <p:spPr>
-          <a:xfrm>
-            <a:off x="0" y="1871904"/>
-            <a:ext cx="931248" cy="707231"/>
-          </a:xfrm>
-          <a:prstGeom prst="ellipse">
-            <a:avLst/>
-          </a:prstGeom>
-        </p:spPr>
-        <p:style>
-          <a:lnRef idx="2">
-            <a:schemeClr val="accent1">
-              <a:shade val="15000"/>
-            </a:schemeClr>
-          </a:lnRef>
-          <a:fillRef idx="1">
-            <a:schemeClr val="accent1"/>
-          </a:fillRef>
-          <a:effectRef idx="0">
-            <a:schemeClr val="accent1"/>
-          </a:effectRef>
-          <a:fontRef idx="minor">
-            <a:schemeClr val="lt1"/>
-          </a:fontRef>
-        </p:style>
-        <p:txBody>
-          <a:bodyPr rtlCol="0" anchor="ctr"/>
-          <a:lstStyle/>
-          <a:p>
-            <a:pPr algn="ctr"/>
-            <a:r>
-              <a:rPr lang="en-US" dirty="0"/>
-              <a:t>Goal</a:t>
-            </a:r>
-          </a:p>
-        </p:txBody>
-      </p:sp>
-      <p:sp>
-        <p:nvSpPr>
-          <p:cNvPr id="31" name="Oval 30">
-            <a:extLst>
-              <a:ext uri="{FF2B5EF4-FFF2-40B4-BE49-F238E27FC236}">
-                <a16:creationId xmlns:a16="http://schemas.microsoft.com/office/drawing/2014/main" id="{7F1ABF4D-364D-0B73-5853-47D988DEFBFC}"/>
-              </a:ext>
-            </a:extLst>
-          </p:cNvPr>
-          <p:cNvSpPr/>
-          <p:nvPr/>
-        </p:nvSpPr>
-        <p:spPr>
-          <a:xfrm>
-            <a:off x="11054440" y="1890984"/>
-            <a:ext cx="1080856" cy="707231"/>
-          </a:xfrm>
-          <a:prstGeom prst="ellipse">
-            <a:avLst/>
-          </a:prstGeom>
-        </p:spPr>
-        <p:style>
-          <a:lnRef idx="2">
-            <a:schemeClr val="accent1">
-              <a:shade val="15000"/>
-            </a:schemeClr>
-          </a:lnRef>
-          <a:fillRef idx="1">
-            <a:schemeClr val="accent1"/>
-          </a:fillRef>
-          <a:effectRef idx="0">
-            <a:schemeClr val="accent1"/>
-          </a:effectRef>
-          <a:fontRef idx="minor">
-            <a:schemeClr val="lt1"/>
-          </a:fontRef>
-        </p:style>
-        <p:txBody>
-          <a:bodyPr rtlCol="0" anchor="ctr"/>
-          <a:lstStyle/>
-          <a:p>
-            <a:pPr algn="ctr"/>
-            <a:r>
-              <a:rPr lang="en-US" dirty="0"/>
-              <a:t>Result</a:t>
-            </a:r>
-          </a:p>
-        </p:txBody>
-      </p:sp>
-      <mc:AlternateContent xmlns:mc="http://schemas.openxmlformats.org/markup-compatibility/2006" xmlns:p14="http://schemas.microsoft.com/office/powerpoint/2010/main">
-        <mc:Choice Requires="p14">
-          <p:contentPart p14:bwMode="auto" r:id="rId16">
-            <p14:nvContentPartPr>
-              <p14:cNvPr id="32" name="Ink 31">
-                <a:extLst>
-                  <a:ext uri="{FF2B5EF4-FFF2-40B4-BE49-F238E27FC236}">
-                    <a16:creationId xmlns:a16="http://schemas.microsoft.com/office/drawing/2014/main" id="{783A5B0B-2FB7-2A1D-1F97-34D46C43ADC8}"/>
-                  </a:ext>
-                </a:extLst>
-              </p14:cNvPr>
-              <p14:cNvContentPartPr/>
-              <p14:nvPr/>
-            </p14:nvContentPartPr>
-            <p14:xfrm>
-              <a:off x="964400" y="2166840"/>
-              <a:ext cx="165960" cy="128520"/>
-            </p14:xfrm>
-          </p:contentPart>
-        </mc:Choice>
-        <mc:Fallback xmlns="">
-          <p:pic>
-            <p:nvPicPr>
-              <p:cNvPr id="32" name="Ink 31">
-                <a:extLst>
-                  <a:ext uri="{FF2B5EF4-FFF2-40B4-BE49-F238E27FC236}">
-                    <a16:creationId xmlns:a16="http://schemas.microsoft.com/office/drawing/2014/main" id="{783A5B0B-2FB7-2A1D-1F97-34D46C43ADC8}"/>
-                  </a:ext>
-                </a:extLst>
-              </p:cNvPr>
-              <p:cNvPicPr/>
-              <p:nvPr/>
-            </p:nvPicPr>
-            <p:blipFill>
-              <a:blip r:embed="rId17"/>
-              <a:stretch>
-                <a:fillRect/>
-              </a:stretch>
-            </p:blipFill>
-            <p:spPr>
-              <a:xfrm>
-                <a:off x="946400" y="2148890"/>
-                <a:ext cx="201600" cy="164060"/>
-              </a:xfrm>
-              <a:prstGeom prst="rect">
-                <a:avLst/>
-              </a:prstGeom>
-            </p:spPr>
-          </p:pic>
-        </mc:Fallback>
-      </mc:AlternateContent>
-      <mc:AlternateContent xmlns:mc="http://schemas.openxmlformats.org/markup-compatibility/2006" xmlns:p14="http://schemas.microsoft.com/office/powerpoint/2010/main">
-        <mc:Choice Requires="p14">
-          <p:contentPart p14:bwMode="auto" r:id="rId18">
-            <p14:nvContentPartPr>
-              <p14:cNvPr id="33" name="Ink 32">
-                <a:extLst>
-                  <a:ext uri="{FF2B5EF4-FFF2-40B4-BE49-F238E27FC236}">
-                    <a16:creationId xmlns:a16="http://schemas.microsoft.com/office/drawing/2014/main" id="{674921D6-68B5-E6A4-02B7-1C6183F8E466}"/>
-                  </a:ext>
-                </a:extLst>
-              </p14:cNvPr>
-              <p14:cNvContentPartPr/>
-              <p14:nvPr/>
-            </p14:nvContentPartPr>
-            <p14:xfrm>
-              <a:off x="10880960" y="2257560"/>
-              <a:ext cx="182880" cy="70560"/>
-            </p14:xfrm>
-          </p:contentPart>
-        </mc:Choice>
-        <mc:Fallback xmlns="">
-          <p:pic>
-            <p:nvPicPr>
-              <p:cNvPr id="33" name="Ink 32">
-                <a:extLst>
-                  <a:ext uri="{FF2B5EF4-FFF2-40B4-BE49-F238E27FC236}">
-                    <a16:creationId xmlns:a16="http://schemas.microsoft.com/office/drawing/2014/main" id="{674921D6-68B5-E6A4-02B7-1C6183F8E466}"/>
-                  </a:ext>
-                </a:extLst>
-              </p:cNvPr>
-              <p:cNvPicPr/>
-              <p:nvPr/>
-            </p:nvPicPr>
-            <p:blipFill>
-              <a:blip r:embed="rId19"/>
-              <a:stretch>
-                <a:fillRect/>
-              </a:stretch>
-            </p:blipFill>
-            <p:spPr>
-              <a:xfrm>
-                <a:off x="10862960" y="2239560"/>
-                <a:ext cx="218520" cy="106200"/>
-              </a:xfrm>
-              <a:prstGeom prst="rect">
-                <a:avLst/>
-              </a:prstGeom>
-            </p:spPr>
-          </p:pic>
-        </mc:Fallback>
-      </mc:AlternateContent>
-      <p:sp>
-        <p:nvSpPr>
-          <p:cNvPr id="4" name="TextBox 3">
-            <a:extLst>
-              <a:ext uri="{FF2B5EF4-FFF2-40B4-BE49-F238E27FC236}">
-                <a16:creationId xmlns:a16="http://schemas.microsoft.com/office/drawing/2014/main" id="{35235576-FB0D-B3B5-5994-A3AB09B908F4}"/>
-              </a:ext>
-            </a:extLst>
-          </p:cNvPr>
-          <p:cNvSpPr txBox="1"/>
-          <p:nvPr/>
-        </p:nvSpPr>
-        <p:spPr>
-          <a:xfrm>
-            <a:off x="310896" y="3105835"/>
-            <a:ext cx="11987784" cy="2677656"/>
-          </a:xfrm>
-          <a:prstGeom prst="rect">
-            <a:avLst/>
-          </a:prstGeom>
-          <a:noFill/>
-        </p:spPr>
-        <p:txBody>
-          <a:bodyPr wrap="square">
-            <a:spAutoFit/>
-          </a:bodyPr>
-          <a:lstStyle/>
-          <a:p>
-            <a:r>
-              <a:rPr lang="en-US" sz="2400" dirty="0">
-                <a:solidFill>
-                  <a:schemeClr val="accent6">
-                    <a:lumMod val="60000"/>
-                    <a:lumOff val="40000"/>
-                  </a:schemeClr>
-                </a:solidFill>
-              </a:rPr>
-              <a:t>GOAL: Add an automatic 'dark mode' toggle to our web app that triggers based on the user's local sunset time.</a:t>
-            </a:r>
-          </a:p>
-          <a:p>
-            <a:endParaRPr lang="en-US" sz="2400" dirty="0">
-              <a:solidFill>
-                <a:schemeClr val="accent6">
-                  <a:lumMod val="60000"/>
-                  <a:lumOff val="40000"/>
-                </a:schemeClr>
-              </a:solidFill>
-            </a:endParaRPr>
-          </a:p>
-          <a:p>
-            <a:r>
-              <a:rPr lang="en-US" sz="2400" dirty="0">
-                <a:solidFill>
-                  <a:schemeClr val="accent6">
-                    <a:lumMod val="60000"/>
-                    <a:lumOff val="40000"/>
-                  </a:schemeClr>
-                </a:solidFill>
-              </a:rPr>
-              <a:t>Agent1 (Product Mgr. ) – Creates/Analyses the requirements, and defines success criteria. </a:t>
-            </a:r>
-          </a:p>
-          <a:p>
-            <a:r>
-              <a:rPr lang="en-US" sz="2400" dirty="0">
-                <a:solidFill>
-                  <a:schemeClr val="accent6">
-                    <a:lumMod val="60000"/>
-                    <a:lumOff val="40000"/>
-                  </a:schemeClr>
-                </a:solidFill>
-              </a:rPr>
-              <a:t>Agent2 (Planner) - Takes the requirements and assigns it the software Dev agent and QA</a:t>
-            </a:r>
-          </a:p>
-          <a:p>
-            <a:r>
-              <a:rPr lang="en-US" sz="2400" dirty="0">
-                <a:solidFill>
-                  <a:schemeClr val="accent6">
-                    <a:lumMod val="60000"/>
-                    <a:lumOff val="40000"/>
-                  </a:schemeClr>
-                </a:solidFill>
-              </a:rPr>
-              <a:t>Agent3 (Developer) -  Develops the code</a:t>
-            </a:r>
-          </a:p>
-          <a:p>
-            <a:r>
-              <a:rPr lang="en-US" sz="2400" dirty="0">
-                <a:solidFill>
-                  <a:schemeClr val="accent6">
-                    <a:lumMod val="60000"/>
-                    <a:lumOff val="40000"/>
-                  </a:schemeClr>
-                </a:solidFill>
-              </a:rPr>
-              <a:t>Agent4 (Quality Assurance) - Reviews code, writes tests, and hunts for bugs.</a:t>
-            </a:r>
-          </a:p>
-        </p:txBody>
-      </p:sp>
-    </p:spTree>
-    <p:extLst>
-      <p:ext uri="{BB962C8B-B14F-4D97-AF65-F5344CB8AC3E}">
-        <p14:creationId xmlns:p14="http://schemas.microsoft.com/office/powerpoint/2010/main" val="1311170348"/>
       </p:ext>
     </p:extLst>
   </p:cSld>
